--- a/docs/寻味美食推荐平台-第十组-项目汇报.pptx
+++ b/docs/寻味美食推荐平台-第十组-项目汇报.pptx
@@ -4158,23 +4158,23 @@
         </p:nvSpPr>
         <p:spPr>
           <a:xfrm>
-            <a:off x="777240" y="457200"/>
-            <a:ext cx="8595360" cy="457200"/>
-          </a:xfrm>
-          <a:prstGeom prst="rect">
-            <a:avLst/>
-          </a:prstGeom>
-          <a:noFill/>
-        </p:spPr>
-        <p:txBody>
-          <a:bodyPr wrap="square" anchor="t" lIns="0" rIns="0" tIns="0" bIns="0">
-            <a:noAutofit/>
-          </a:bodyPr>
-          <a:lstStyle/>
-          <a:p>
-            <a:pPr algn="l">
-              <a:lnSpc>
-                <a:spcPct val="128000"/>
+            <a:off x="777240" y="438912"/>
+            <a:ext cx="8595360" cy="603504"/>
+          </a:xfrm>
+          <a:prstGeom prst="rect">
+            <a:avLst/>
+          </a:prstGeom>
+          <a:noFill/>
+        </p:spPr>
+        <p:txBody>
+          <a:bodyPr wrap="square" anchor="t" lIns="0" rIns="0" tIns="0" bIns="0">
+            <a:noAutofit/>
+          </a:bodyPr>
+          <a:lstStyle/>
+          <a:p>
+            <a:pPr algn="l">
+              <a:lnSpc>
+                <a:spcPct val="105000"/>
               </a:lnSpc>
               <a:spcBef>
                 <a:spcPts val="0"/>
@@ -4443,6 +4443,993 @@
           <a:prstGeom prst="roundRect">
             <a:avLst>
               <a:gd name="adj" fmla="val 8000"/>
+            </a:avLst>
+          </a:prstGeom>
+          <a:solidFill>
+            <a:srgbClr val="FFFFFF"/>
+          </a:solidFill>
+          <a:ln w="9525">
+            <a:solidFill>
+              <a:srgbClr val="EBE0D6"/>
+            </a:solidFill>
+          </a:ln>
+          <a:effectLst>
+            <a:outerShdw blurRad="114300" dist="50800" dir="5400000" rotWithShape="0">
+              <a:srgbClr val="40210A">
+                <a:alpha val="11000"/>
+              </a:srgbClr>
+            </a:outerShdw>
+          </a:effectLst>
+        </p:spPr>
+        <p:style>
+          <a:lnRef idx="1">
+            <a:schemeClr val="accent1"/>
+          </a:lnRef>
+          <a:fillRef idx="3">
+            <a:schemeClr val="accent1"/>
+          </a:fillRef>
+          <a:effectRef idx="2">
+            <a:schemeClr val="accent1"/>
+          </a:effectRef>
+          <a:fontRef idx="minor">
+            <a:schemeClr val="lt1"/>
+          </a:fontRef>
+        </p:style>
+        <p:txBody>
+          <a:bodyPr rtlCol="0" anchor="ctr" wrap="square"/>
+          <a:lstStyle/>
+          <a:p>
+            <a:pPr algn="ctr"/>
+          </a:p>
+        </p:txBody>
+      </p:sp>
+      <p:sp>
+        <p:nvSpPr>
+          <p:cNvPr id="10" name="Rectangle 9"/>
+          <p:cNvSpPr/>
+          <p:nvPr/>
+        </p:nvSpPr>
+        <p:spPr>
+          <a:xfrm>
+            <a:off x="566928" y="1444752"/>
+            <a:ext cx="2670048" cy="50292"/>
+          </a:xfrm>
+          <a:prstGeom prst="rect">
+            <a:avLst/>
+          </a:prstGeom>
+          <a:solidFill>
+            <a:srgbClr val="F97316"/>
+          </a:solidFill>
+          <a:ln>
+            <a:noFill/>
+          </a:ln>
+          <a:effectLst/>
+        </p:spPr>
+        <p:style>
+          <a:lnRef idx="1">
+            <a:schemeClr val="accent1"/>
+          </a:lnRef>
+          <a:fillRef idx="3">
+            <a:schemeClr val="accent1"/>
+          </a:fillRef>
+          <a:effectRef idx="2">
+            <a:schemeClr val="accent1"/>
+          </a:effectRef>
+          <a:fontRef idx="minor">
+            <a:schemeClr val="lt1"/>
+          </a:fontRef>
+        </p:style>
+        <p:txBody>
+          <a:bodyPr rtlCol="0" anchor="ctr" wrap="square"/>
+          <a:lstStyle/>
+          <a:p>
+            <a:pPr algn="ctr"/>
+          </a:p>
+        </p:txBody>
+      </p:sp>
+      <p:sp>
+        <p:nvSpPr>
+          <p:cNvPr id="11" name="TextBox 10"/>
+          <p:cNvSpPr txBox="1"/>
+          <p:nvPr/>
+        </p:nvSpPr>
+        <p:spPr>
+          <a:xfrm>
+            <a:off x="749808" y="1682496"/>
+            <a:ext cx="2304288" cy="502920"/>
+          </a:xfrm>
+          <a:prstGeom prst="rect">
+            <a:avLst/>
+          </a:prstGeom>
+          <a:noFill/>
+        </p:spPr>
+        <p:txBody>
+          <a:bodyPr wrap="square" anchor="t" lIns="0" rIns="0" tIns="0" bIns="0">
+            <a:noAutofit/>
+          </a:bodyPr>
+          <a:lstStyle/>
+          <a:p>
+            <a:pPr algn="l">
+              <a:lnSpc>
+                <a:spcPct val="100000"/>
+              </a:lnSpc>
+              <a:spcAft>
+                <a:spcPts val="0"/>
+              </a:spcAft>
+            </a:pPr>
+            <a:r>
+              <a:rPr sz="2700" b="1" i="0">
+                <a:solidFill>
+                  <a:srgbClr val="F97316"/>
+                </a:solidFill>
+                <a:latin typeface="微软雅黑"/>
+                <a:ea typeface="微软雅黑"/>
+                <a:cs typeface="微软雅黑"/>
+              </a:rPr>
+              <a:t>196</a:t>
+            </a:r>
+            <a:r>
+              <a:rPr sz="1100" b="0" i="0">
+                <a:solidFill>
+                  <a:srgbClr val="6E7686"/>
+                </a:solidFill>
+                <a:latin typeface="微软雅黑"/>
+                <a:ea typeface="微软雅黑"/>
+                <a:cs typeface="微软雅黑"/>
+              </a:rPr>
+              <a:t>项</a:t>
+            </a:r>
+          </a:p>
+        </p:txBody>
+      </p:sp>
+      <p:sp>
+        <p:nvSpPr>
+          <p:cNvPr id="12" name="TextBox 11"/>
+          <p:cNvSpPr txBox="1"/>
+          <p:nvPr/>
+        </p:nvSpPr>
+        <p:spPr>
+          <a:xfrm>
+            <a:off x="749808" y="2212848"/>
+            <a:ext cx="2304288" cy="256032"/>
+          </a:xfrm>
+          <a:prstGeom prst="rect">
+            <a:avLst/>
+          </a:prstGeom>
+          <a:noFill/>
+        </p:spPr>
+        <p:txBody>
+          <a:bodyPr wrap="square" anchor="t" lIns="0" rIns="0" tIns="0" bIns="0">
+            <a:noAutofit/>
+          </a:bodyPr>
+          <a:lstStyle/>
+          <a:p>
+            <a:pPr algn="l">
+              <a:lnSpc>
+                <a:spcPct val="128000"/>
+              </a:lnSpc>
+              <a:spcBef>
+                <a:spcPts val="0"/>
+              </a:spcBef>
+              <a:spcAft>
+                <a:spcPts val="0"/>
+              </a:spcAft>
+            </a:pPr>
+            <a:r>
+              <a:rPr sz="1100" b="1" i="0">
+                <a:solidFill>
+                  <a:srgbClr val="333A4D"/>
+                </a:solidFill>
+                <a:latin typeface="微软雅黑"/>
+                <a:ea typeface="微软雅黑"/>
+                <a:cs typeface="微软雅黑"/>
+              </a:rPr>
+              <a:t>pytest 全绿</a:t>
+            </a:r>
+          </a:p>
+        </p:txBody>
+      </p:sp>
+      <p:sp>
+        <p:nvSpPr>
+          <p:cNvPr id="13" name="Rounded Rectangle 12"/>
+          <p:cNvSpPr/>
+          <p:nvPr/>
+        </p:nvSpPr>
+        <p:spPr>
+          <a:xfrm>
+            <a:off x="3410712" y="1444752"/>
+            <a:ext cx="2670048" cy="1298448"/>
+          </a:xfrm>
+          <a:prstGeom prst="roundRect">
+            <a:avLst>
+              <a:gd name="adj" fmla="val 8000"/>
+            </a:avLst>
+          </a:prstGeom>
+          <a:solidFill>
+            <a:srgbClr val="FFFFFF"/>
+          </a:solidFill>
+          <a:ln w="9525">
+            <a:solidFill>
+              <a:srgbClr val="EBE0D6"/>
+            </a:solidFill>
+          </a:ln>
+          <a:effectLst>
+            <a:outerShdw blurRad="114300" dist="50800" dir="5400000" rotWithShape="0">
+              <a:srgbClr val="40210A">
+                <a:alpha val="11000"/>
+              </a:srgbClr>
+            </a:outerShdw>
+          </a:effectLst>
+        </p:spPr>
+        <p:style>
+          <a:lnRef idx="1">
+            <a:schemeClr val="accent1"/>
+          </a:lnRef>
+          <a:fillRef idx="3">
+            <a:schemeClr val="accent1"/>
+          </a:fillRef>
+          <a:effectRef idx="2">
+            <a:schemeClr val="accent1"/>
+          </a:effectRef>
+          <a:fontRef idx="minor">
+            <a:schemeClr val="lt1"/>
+          </a:fontRef>
+        </p:style>
+        <p:txBody>
+          <a:bodyPr rtlCol="0" anchor="ctr" wrap="square"/>
+          <a:lstStyle/>
+          <a:p>
+            <a:pPr algn="ctr"/>
+          </a:p>
+        </p:txBody>
+      </p:sp>
+      <p:sp>
+        <p:nvSpPr>
+          <p:cNvPr id="14" name="Rectangle 13"/>
+          <p:cNvSpPr/>
+          <p:nvPr/>
+        </p:nvSpPr>
+        <p:spPr>
+          <a:xfrm>
+            <a:off x="3410712" y="1444752"/>
+            <a:ext cx="2670048" cy="50292"/>
+          </a:xfrm>
+          <a:prstGeom prst="rect">
+            <a:avLst/>
+          </a:prstGeom>
+          <a:solidFill>
+            <a:srgbClr val="F97316"/>
+          </a:solidFill>
+          <a:ln>
+            <a:noFill/>
+          </a:ln>
+          <a:effectLst/>
+        </p:spPr>
+        <p:style>
+          <a:lnRef idx="1">
+            <a:schemeClr val="accent1"/>
+          </a:lnRef>
+          <a:fillRef idx="3">
+            <a:schemeClr val="accent1"/>
+          </a:fillRef>
+          <a:effectRef idx="2">
+            <a:schemeClr val="accent1"/>
+          </a:effectRef>
+          <a:fontRef idx="minor">
+            <a:schemeClr val="lt1"/>
+          </a:fontRef>
+        </p:style>
+        <p:txBody>
+          <a:bodyPr rtlCol="0" anchor="ctr" wrap="square"/>
+          <a:lstStyle/>
+          <a:p>
+            <a:pPr algn="ctr"/>
+          </a:p>
+        </p:txBody>
+      </p:sp>
+      <p:sp>
+        <p:nvSpPr>
+          <p:cNvPr id="15" name="TextBox 14"/>
+          <p:cNvSpPr txBox="1"/>
+          <p:nvPr/>
+        </p:nvSpPr>
+        <p:spPr>
+          <a:xfrm>
+            <a:off x="3593592" y="1682496"/>
+            <a:ext cx="2304288" cy="502920"/>
+          </a:xfrm>
+          <a:prstGeom prst="rect">
+            <a:avLst/>
+          </a:prstGeom>
+          <a:noFill/>
+        </p:spPr>
+        <p:txBody>
+          <a:bodyPr wrap="square" anchor="t" lIns="0" rIns="0" tIns="0" bIns="0">
+            <a:noAutofit/>
+          </a:bodyPr>
+          <a:lstStyle/>
+          <a:p>
+            <a:pPr algn="l">
+              <a:lnSpc>
+                <a:spcPct val="100000"/>
+              </a:lnSpc>
+              <a:spcAft>
+                <a:spcPts val="0"/>
+              </a:spcAft>
+            </a:pPr>
+            <a:r>
+              <a:rPr sz="2700" b="1" i="0">
+                <a:solidFill>
+                  <a:srgbClr val="F97316"/>
+                </a:solidFill>
+                <a:latin typeface="微软雅黑"/>
+                <a:ea typeface="微软雅黑"/>
+                <a:cs typeface="微软雅黑"/>
+              </a:rPr>
+              <a:t>74</a:t>
+            </a:r>
+            <a:r>
+              <a:rPr sz="1100" b="0" i="0">
+                <a:solidFill>
+                  <a:srgbClr val="6E7686"/>
+                </a:solidFill>
+                <a:latin typeface="微软雅黑"/>
+                <a:ea typeface="微软雅黑"/>
+                <a:cs typeface="微软雅黑"/>
+              </a:rPr>
+              <a:t>个</a:t>
+            </a:r>
+          </a:p>
+        </p:txBody>
+      </p:sp>
+      <p:sp>
+        <p:nvSpPr>
+          <p:cNvPr id="16" name="TextBox 15"/>
+          <p:cNvSpPr txBox="1"/>
+          <p:nvPr/>
+        </p:nvSpPr>
+        <p:spPr>
+          <a:xfrm>
+            <a:off x="3593592" y="2212848"/>
+            <a:ext cx="2304288" cy="256032"/>
+          </a:xfrm>
+          <a:prstGeom prst="rect">
+            <a:avLst/>
+          </a:prstGeom>
+          <a:noFill/>
+        </p:spPr>
+        <p:txBody>
+          <a:bodyPr wrap="square" anchor="t" lIns="0" rIns="0" tIns="0" bIns="0">
+            <a:noAutofit/>
+          </a:bodyPr>
+          <a:lstStyle/>
+          <a:p>
+            <a:pPr algn="l">
+              <a:lnSpc>
+                <a:spcPct val="128000"/>
+              </a:lnSpc>
+              <a:spcBef>
+                <a:spcPts val="0"/>
+              </a:spcBef>
+              <a:spcAft>
+                <a:spcPts val="0"/>
+              </a:spcAft>
+            </a:pPr>
+            <a:r>
+              <a:rPr sz="1100" b="1" i="0">
+                <a:solidFill>
+                  <a:srgbClr val="333A4D"/>
+                </a:solidFill>
+                <a:latin typeface="微软雅黑"/>
+                <a:ea typeface="微软雅黑"/>
+                <a:cs typeface="微软雅黑"/>
+              </a:rPr>
+              <a:t>Python 模块</a:t>
+            </a:r>
+          </a:p>
+        </p:txBody>
+      </p:sp>
+      <p:sp>
+        <p:nvSpPr>
+          <p:cNvPr id="17" name="Rounded Rectangle 16"/>
+          <p:cNvSpPr/>
+          <p:nvPr/>
+        </p:nvSpPr>
+        <p:spPr>
+          <a:xfrm>
+            <a:off x="6254496" y="1444752"/>
+            <a:ext cx="2670048" cy="1298448"/>
+          </a:xfrm>
+          <a:prstGeom prst="roundRect">
+            <a:avLst>
+              <a:gd name="adj" fmla="val 8000"/>
+            </a:avLst>
+          </a:prstGeom>
+          <a:solidFill>
+            <a:srgbClr val="FFFFFF"/>
+          </a:solidFill>
+          <a:ln w="9525">
+            <a:solidFill>
+              <a:srgbClr val="EBE0D6"/>
+            </a:solidFill>
+          </a:ln>
+          <a:effectLst>
+            <a:outerShdw blurRad="114300" dist="50800" dir="5400000" rotWithShape="0">
+              <a:srgbClr val="40210A">
+                <a:alpha val="11000"/>
+              </a:srgbClr>
+            </a:outerShdw>
+          </a:effectLst>
+        </p:spPr>
+        <p:style>
+          <a:lnRef idx="1">
+            <a:schemeClr val="accent1"/>
+          </a:lnRef>
+          <a:fillRef idx="3">
+            <a:schemeClr val="accent1"/>
+          </a:fillRef>
+          <a:effectRef idx="2">
+            <a:schemeClr val="accent1"/>
+          </a:effectRef>
+          <a:fontRef idx="minor">
+            <a:schemeClr val="lt1"/>
+          </a:fontRef>
+        </p:style>
+        <p:txBody>
+          <a:bodyPr rtlCol="0" anchor="ctr" wrap="square"/>
+          <a:lstStyle/>
+          <a:p>
+            <a:pPr algn="ctr"/>
+          </a:p>
+        </p:txBody>
+      </p:sp>
+      <p:sp>
+        <p:nvSpPr>
+          <p:cNvPr id="18" name="Rectangle 17"/>
+          <p:cNvSpPr/>
+          <p:nvPr/>
+        </p:nvSpPr>
+        <p:spPr>
+          <a:xfrm>
+            <a:off x="6254496" y="1444752"/>
+            <a:ext cx="2670048" cy="50292"/>
+          </a:xfrm>
+          <a:prstGeom prst="rect">
+            <a:avLst/>
+          </a:prstGeom>
+          <a:solidFill>
+            <a:srgbClr val="0F9B8E"/>
+          </a:solidFill>
+          <a:ln>
+            <a:noFill/>
+          </a:ln>
+          <a:effectLst/>
+        </p:spPr>
+        <p:style>
+          <a:lnRef idx="1">
+            <a:schemeClr val="accent1"/>
+          </a:lnRef>
+          <a:fillRef idx="3">
+            <a:schemeClr val="accent1"/>
+          </a:fillRef>
+          <a:effectRef idx="2">
+            <a:schemeClr val="accent1"/>
+          </a:effectRef>
+          <a:fontRef idx="minor">
+            <a:schemeClr val="lt1"/>
+          </a:fontRef>
+        </p:style>
+        <p:txBody>
+          <a:bodyPr rtlCol="0" anchor="ctr" wrap="square"/>
+          <a:lstStyle/>
+          <a:p>
+            <a:pPr algn="ctr"/>
+          </a:p>
+        </p:txBody>
+      </p:sp>
+      <p:sp>
+        <p:nvSpPr>
+          <p:cNvPr id="19" name="TextBox 18"/>
+          <p:cNvSpPr txBox="1"/>
+          <p:nvPr/>
+        </p:nvSpPr>
+        <p:spPr>
+          <a:xfrm>
+            <a:off x="6437376" y="1682496"/>
+            <a:ext cx="2304288" cy="502920"/>
+          </a:xfrm>
+          <a:prstGeom prst="rect">
+            <a:avLst/>
+          </a:prstGeom>
+          <a:noFill/>
+        </p:spPr>
+        <p:txBody>
+          <a:bodyPr wrap="square" anchor="t" lIns="0" rIns="0" tIns="0" bIns="0">
+            <a:noAutofit/>
+          </a:bodyPr>
+          <a:lstStyle/>
+          <a:p>
+            <a:pPr algn="l">
+              <a:lnSpc>
+                <a:spcPct val="100000"/>
+              </a:lnSpc>
+              <a:spcAft>
+                <a:spcPts val="0"/>
+              </a:spcAft>
+            </a:pPr>
+            <a:r>
+              <a:rPr sz="2700" b="1" i="0">
+                <a:solidFill>
+                  <a:srgbClr val="0F9B8E"/>
+                </a:solidFill>
+                <a:latin typeface="微软雅黑"/>
+                <a:ea typeface="微软雅黑"/>
+                <a:cs typeface="微软雅黑"/>
+              </a:rPr>
+              <a:t>15,752</a:t>
+            </a:r>
+            <a:r>
+              <a:rPr sz="1100" b="0" i="0">
+                <a:solidFill>
+                  <a:srgbClr val="6E7686"/>
+                </a:solidFill>
+                <a:latin typeface="微软雅黑"/>
+                <a:ea typeface="微软雅黑"/>
+                <a:cs typeface="微软雅黑"/>
+              </a:rPr>
+              <a:t>行</a:t>
+            </a:r>
+          </a:p>
+        </p:txBody>
+      </p:sp>
+      <p:sp>
+        <p:nvSpPr>
+          <p:cNvPr id="20" name="TextBox 19"/>
+          <p:cNvSpPr txBox="1"/>
+          <p:nvPr/>
+        </p:nvSpPr>
+        <p:spPr>
+          <a:xfrm>
+            <a:off x="6437376" y="2212848"/>
+            <a:ext cx="2304288" cy="256032"/>
+          </a:xfrm>
+          <a:prstGeom prst="rect">
+            <a:avLst/>
+          </a:prstGeom>
+          <a:noFill/>
+        </p:spPr>
+        <p:txBody>
+          <a:bodyPr wrap="square" anchor="t" lIns="0" rIns="0" tIns="0" bIns="0">
+            <a:noAutofit/>
+          </a:bodyPr>
+          <a:lstStyle/>
+          <a:p>
+            <a:pPr algn="l">
+              <a:lnSpc>
+                <a:spcPct val="128000"/>
+              </a:lnSpc>
+              <a:spcBef>
+                <a:spcPts val="0"/>
+              </a:spcBef>
+              <a:spcAft>
+                <a:spcPts val="0"/>
+              </a:spcAft>
+            </a:pPr>
+            <a:r>
+              <a:rPr sz="1100" b="1" i="0">
+                <a:solidFill>
+                  <a:srgbClr val="333A4D"/>
+                </a:solidFill>
+                <a:latin typeface="微软雅黑"/>
+                <a:ea typeface="微软雅黑"/>
+                <a:cs typeface="微软雅黑"/>
+              </a:rPr>
+              <a:t>Python 代码</a:t>
+            </a:r>
+          </a:p>
+        </p:txBody>
+      </p:sp>
+      <p:sp>
+        <p:nvSpPr>
+          <p:cNvPr id="21" name="Rounded Rectangle 20"/>
+          <p:cNvSpPr/>
+          <p:nvPr/>
+        </p:nvSpPr>
+        <p:spPr>
+          <a:xfrm>
+            <a:off x="9098280" y="1444752"/>
+            <a:ext cx="2670048" cy="1298448"/>
+          </a:xfrm>
+          <a:prstGeom prst="roundRect">
+            <a:avLst>
+              <a:gd name="adj" fmla="val 8000"/>
+            </a:avLst>
+          </a:prstGeom>
+          <a:solidFill>
+            <a:srgbClr val="FFFFFF"/>
+          </a:solidFill>
+          <a:ln w="9525">
+            <a:solidFill>
+              <a:srgbClr val="EBE0D6"/>
+            </a:solidFill>
+          </a:ln>
+          <a:effectLst>
+            <a:outerShdw blurRad="114300" dist="50800" dir="5400000" rotWithShape="0">
+              <a:srgbClr val="40210A">
+                <a:alpha val="11000"/>
+              </a:srgbClr>
+            </a:outerShdw>
+          </a:effectLst>
+        </p:spPr>
+        <p:style>
+          <a:lnRef idx="1">
+            <a:schemeClr val="accent1"/>
+          </a:lnRef>
+          <a:fillRef idx="3">
+            <a:schemeClr val="accent1"/>
+          </a:fillRef>
+          <a:effectRef idx="2">
+            <a:schemeClr val="accent1"/>
+          </a:effectRef>
+          <a:fontRef idx="minor">
+            <a:schemeClr val="lt1"/>
+          </a:fontRef>
+        </p:style>
+        <p:txBody>
+          <a:bodyPr rtlCol="0" anchor="ctr" wrap="square"/>
+          <a:lstStyle/>
+          <a:p>
+            <a:pPr algn="ctr"/>
+          </a:p>
+        </p:txBody>
+      </p:sp>
+      <p:sp>
+        <p:nvSpPr>
+          <p:cNvPr id="22" name="Rectangle 21"/>
+          <p:cNvSpPr/>
+          <p:nvPr/>
+        </p:nvSpPr>
+        <p:spPr>
+          <a:xfrm>
+            <a:off x="9098280" y="1444752"/>
+            <a:ext cx="2670048" cy="50292"/>
+          </a:xfrm>
+          <a:prstGeom prst="rect">
+            <a:avLst/>
+          </a:prstGeom>
+          <a:solidFill>
+            <a:srgbClr val="0F9B8E"/>
+          </a:solidFill>
+          <a:ln>
+            <a:noFill/>
+          </a:ln>
+          <a:effectLst/>
+        </p:spPr>
+        <p:style>
+          <a:lnRef idx="1">
+            <a:schemeClr val="accent1"/>
+          </a:lnRef>
+          <a:fillRef idx="3">
+            <a:schemeClr val="accent1"/>
+          </a:fillRef>
+          <a:effectRef idx="2">
+            <a:schemeClr val="accent1"/>
+          </a:effectRef>
+          <a:fontRef idx="minor">
+            <a:schemeClr val="lt1"/>
+          </a:fontRef>
+        </p:style>
+        <p:txBody>
+          <a:bodyPr rtlCol="0" anchor="ctr" wrap="square"/>
+          <a:lstStyle/>
+          <a:p>
+            <a:pPr algn="ctr"/>
+          </a:p>
+        </p:txBody>
+      </p:sp>
+      <p:sp>
+        <p:nvSpPr>
+          <p:cNvPr id="23" name="TextBox 22"/>
+          <p:cNvSpPr txBox="1"/>
+          <p:nvPr/>
+        </p:nvSpPr>
+        <p:spPr>
+          <a:xfrm>
+            <a:off x="9281159" y="1682496"/>
+            <a:ext cx="2304288" cy="502920"/>
+          </a:xfrm>
+          <a:prstGeom prst="rect">
+            <a:avLst/>
+          </a:prstGeom>
+          <a:noFill/>
+        </p:spPr>
+        <p:txBody>
+          <a:bodyPr wrap="square" anchor="t" lIns="0" rIns="0" tIns="0" bIns="0">
+            <a:noAutofit/>
+          </a:bodyPr>
+          <a:lstStyle/>
+          <a:p>
+            <a:pPr algn="l">
+              <a:lnSpc>
+                <a:spcPct val="100000"/>
+              </a:lnSpc>
+              <a:spcAft>
+                <a:spcPts val="0"/>
+              </a:spcAft>
+            </a:pPr>
+            <a:r>
+              <a:rPr sz="2700" b="1" i="0">
+                <a:solidFill>
+                  <a:srgbClr val="0F9B8E"/>
+                </a:solidFill>
+                <a:latin typeface="微软雅黑"/>
+                <a:ea typeface="微软雅黑"/>
+                <a:cs typeface="微软雅黑"/>
+              </a:rPr>
+              <a:t>22,000</a:t>
+            </a:r>
+            <a:r>
+              <a:rPr sz="1100" b="0" i="0">
+                <a:solidFill>
+                  <a:srgbClr val="6E7686"/>
+                </a:solidFill>
+                <a:latin typeface="微软雅黑"/>
+                <a:ea typeface="微软雅黑"/>
+                <a:cs typeface="微软雅黑"/>
+              </a:rPr>
+              <a:t>行</a:t>
+            </a:r>
+          </a:p>
+        </p:txBody>
+      </p:sp>
+      <p:sp>
+        <p:nvSpPr>
+          <p:cNvPr id="24" name="TextBox 23"/>
+          <p:cNvSpPr txBox="1"/>
+          <p:nvPr/>
+        </p:nvSpPr>
+        <p:spPr>
+          <a:xfrm>
+            <a:off x="9281159" y="2212848"/>
+            <a:ext cx="2304288" cy="256032"/>
+          </a:xfrm>
+          <a:prstGeom prst="rect">
+            <a:avLst/>
+          </a:prstGeom>
+          <a:noFill/>
+        </p:spPr>
+        <p:txBody>
+          <a:bodyPr wrap="square" anchor="t" lIns="0" rIns="0" tIns="0" bIns="0">
+            <a:noAutofit/>
+          </a:bodyPr>
+          <a:lstStyle/>
+          <a:p>
+            <a:pPr algn="l">
+              <a:lnSpc>
+                <a:spcPct val="128000"/>
+              </a:lnSpc>
+              <a:spcBef>
+                <a:spcPts val="0"/>
+              </a:spcBef>
+              <a:spcAft>
+                <a:spcPts val="0"/>
+              </a:spcAft>
+            </a:pPr>
+            <a:r>
+              <a:rPr sz="1100" b="1" i="0">
+                <a:solidFill>
+                  <a:srgbClr val="333A4D"/>
+                </a:solidFill>
+                <a:latin typeface="微软雅黑"/>
+                <a:ea typeface="微软雅黑"/>
+                <a:cs typeface="微软雅黑"/>
+              </a:rPr>
+              <a:t>前端 JS/CSS</a:t>
+            </a:r>
+          </a:p>
+        </p:txBody>
+      </p:sp>
+      <p:sp>
+        <p:nvSpPr>
+          <p:cNvPr id="25" name="Rounded Rectangle 24"/>
+          <p:cNvSpPr/>
+          <p:nvPr/>
+        </p:nvSpPr>
+        <p:spPr>
+          <a:xfrm>
+            <a:off x="566928" y="2907792"/>
+            <a:ext cx="11027663" cy="347472"/>
+          </a:xfrm>
+          <a:prstGeom prst="roundRect">
+            <a:avLst>
+              <a:gd name="adj" fmla="val 4000"/>
+            </a:avLst>
+          </a:prstGeom>
+          <a:solidFill>
+            <a:srgbClr val="1B2030"/>
+          </a:solidFill>
+          <a:ln>
+            <a:noFill/>
+          </a:ln>
+          <a:effectLst/>
+        </p:spPr>
+        <p:style>
+          <a:lnRef idx="1">
+            <a:schemeClr val="accent1"/>
+          </a:lnRef>
+          <a:fillRef idx="3">
+            <a:schemeClr val="accent1"/>
+          </a:fillRef>
+          <a:effectRef idx="2">
+            <a:schemeClr val="accent1"/>
+          </a:effectRef>
+          <a:fontRef idx="minor">
+            <a:schemeClr val="lt1"/>
+          </a:fontRef>
+        </p:style>
+        <p:txBody>
+          <a:bodyPr rtlCol="0" anchor="ctr" wrap="square"/>
+          <a:lstStyle/>
+          <a:p>
+            <a:pPr algn="ctr"/>
+          </a:p>
+        </p:txBody>
+      </p:sp>
+      <p:sp>
+        <p:nvSpPr>
+          <p:cNvPr id="26" name="TextBox 25"/>
+          <p:cNvSpPr txBox="1"/>
+          <p:nvPr/>
+        </p:nvSpPr>
+        <p:spPr>
+          <a:xfrm>
+            <a:off x="731520" y="2962656"/>
+            <a:ext cx="2743200" cy="237744"/>
+          </a:xfrm>
+          <a:prstGeom prst="rect">
+            <a:avLst/>
+          </a:prstGeom>
+          <a:noFill/>
+        </p:spPr>
+        <p:txBody>
+          <a:bodyPr wrap="square" anchor="t" lIns="0" rIns="0" tIns="0" bIns="0">
+            <a:noAutofit/>
+          </a:bodyPr>
+          <a:lstStyle/>
+          <a:p>
+            <a:pPr algn="l">
+              <a:lnSpc>
+                <a:spcPct val="128000"/>
+              </a:lnSpc>
+              <a:spcBef>
+                <a:spcPts val="0"/>
+              </a:spcBef>
+              <a:spcAft>
+                <a:spcPts val="0"/>
+              </a:spcAft>
+            </a:pPr>
+            <a:r>
+              <a:rPr sz="1000" b="1" i="0">
+                <a:solidFill>
+                  <a:srgbClr val="FFFFFF"/>
+                </a:solidFill>
+                <a:latin typeface="微软雅黑"/>
+                <a:ea typeface="微软雅黑"/>
+                <a:cs typeface="微软雅黑"/>
+              </a:rPr>
+              <a:t>外部能力</a:t>
+            </a:r>
+          </a:p>
+        </p:txBody>
+      </p:sp>
+      <p:sp>
+        <p:nvSpPr>
+          <p:cNvPr id="27" name="TextBox 26"/>
+          <p:cNvSpPr txBox="1"/>
+          <p:nvPr/>
+        </p:nvSpPr>
+        <p:spPr>
+          <a:xfrm>
+            <a:off x="3749039" y="2962656"/>
+            <a:ext cx="4023360" cy="237744"/>
+          </a:xfrm>
+          <a:prstGeom prst="rect">
+            <a:avLst/>
+          </a:prstGeom>
+          <a:noFill/>
+        </p:spPr>
+        <p:txBody>
+          <a:bodyPr wrap="square" anchor="t" lIns="0" rIns="0" tIns="0" bIns="0">
+            <a:noAutofit/>
+          </a:bodyPr>
+          <a:lstStyle/>
+          <a:p>
+            <a:pPr algn="l">
+              <a:lnSpc>
+                <a:spcPct val="128000"/>
+              </a:lnSpc>
+              <a:spcBef>
+                <a:spcPts val="0"/>
+              </a:spcBef>
+              <a:spcAft>
+                <a:spcPts val="0"/>
+              </a:spcAft>
+            </a:pPr>
+            <a:r>
+              <a:rPr sz="1000" b="1" i="0">
+                <a:solidFill>
+                  <a:srgbClr val="FFFFFF"/>
+                </a:solidFill>
+                <a:latin typeface="微软雅黑"/>
+                <a:ea typeface="微软雅黑"/>
+                <a:cs typeface="微软雅黑"/>
+              </a:rPr>
+              <a:t>缺失 / 异常时的行为</a:t>
+            </a:r>
+          </a:p>
+        </p:txBody>
+      </p:sp>
+      <p:sp>
+        <p:nvSpPr>
+          <p:cNvPr id="28" name="TextBox 27"/>
+          <p:cNvSpPr txBox="1"/>
+          <p:nvPr/>
+        </p:nvSpPr>
+        <p:spPr>
+          <a:xfrm>
+            <a:off x="8046720" y="2962656"/>
+            <a:ext cx="3438144" cy="237744"/>
+          </a:xfrm>
+          <a:prstGeom prst="rect">
+            <a:avLst/>
+          </a:prstGeom>
+          <a:noFill/>
+        </p:spPr>
+        <p:txBody>
+          <a:bodyPr wrap="square" anchor="t" lIns="0" rIns="0" tIns="0" bIns="0">
+            <a:noAutofit/>
+          </a:bodyPr>
+          <a:lstStyle/>
+          <a:p>
+            <a:pPr algn="l">
+              <a:lnSpc>
+                <a:spcPct val="128000"/>
+              </a:lnSpc>
+              <a:spcBef>
+                <a:spcPts val="0"/>
+              </a:spcBef>
+              <a:spcAft>
+                <a:spcPts val="0"/>
+              </a:spcAft>
+            </a:pPr>
+            <a:r>
+              <a:rPr sz="1000" b="1" i="0">
+                <a:solidFill>
+                  <a:srgbClr val="FFFFFF"/>
+                </a:solidFill>
+                <a:latin typeface="微软雅黑"/>
+                <a:ea typeface="微软雅黑"/>
+                <a:cs typeface="微软雅黑"/>
+              </a:rPr>
+              <a:t>对用户的影响</a:t>
+            </a:r>
+          </a:p>
+        </p:txBody>
+      </p:sp>
+      <p:sp>
+        <p:nvSpPr>
+          <p:cNvPr id="29" name="Rounded Rectangle 28"/>
+          <p:cNvSpPr/>
+          <p:nvPr/>
+        </p:nvSpPr>
+        <p:spPr>
+          <a:xfrm>
+            <a:off x="566928" y="3310128"/>
+            <a:ext cx="11027663" cy="448056"/>
+          </a:xfrm>
+          <a:prstGeom prst="roundRect">
+            <a:avLst>
+              <a:gd name="adj" fmla="val 2799"/>
             </a:avLst>
           </a:prstGeom>
           <a:solidFill>
@@ -4454,13 +5441,6 @@
             </a:solidFill>
           </a:ln>
           <a:effectLst/>
-          <a:effectLst>
-            <a:outerShdw blurRad="114300" dist="50800" dir="5400000" rotWithShape="0">
-              <a:srgbClr val="40210A">
-                <a:alpha val="11000"/>
-              </a:srgbClr>
-            </a:outerShdw>
-          </a:effectLst>
         </p:spPr>
         <p:style>
           <a:lnRef idx="1">
@@ -4486,23 +5466,168 @@
       </p:sp>
       <p:sp>
         <p:nvSpPr>
-          <p:cNvPr id="10" name="Rectangle 9"/>
+          <p:cNvPr id="30" name="TextBox 29"/>
+          <p:cNvSpPr txBox="1"/>
+          <p:nvPr/>
+        </p:nvSpPr>
+        <p:spPr>
+          <a:xfrm>
+            <a:off x="731520" y="3383280"/>
+            <a:ext cx="2743200" cy="320040"/>
+          </a:xfrm>
+          <a:prstGeom prst="rect">
+            <a:avLst/>
+          </a:prstGeom>
+          <a:noFill/>
+        </p:spPr>
+        <p:txBody>
+          <a:bodyPr wrap="square" anchor="t" lIns="0" rIns="0" tIns="0" bIns="0">
+            <a:noAutofit/>
+          </a:bodyPr>
+          <a:lstStyle/>
+          <a:p>
+            <a:pPr algn="l">
+              <a:lnSpc>
+                <a:spcPct val="118000"/>
+              </a:lnSpc>
+              <a:spcBef>
+                <a:spcPts val="0"/>
+              </a:spcBef>
+              <a:spcAft>
+                <a:spcPts val="0"/>
+              </a:spcAft>
+            </a:pPr>
+            <a:r>
+              <a:rPr sz="930" b="1" i="0">
+                <a:solidFill>
+                  <a:srgbClr val="1B2030"/>
+                </a:solidFill>
+                <a:latin typeface="微软雅黑"/>
+                <a:ea typeface="微软雅黑"/>
+                <a:cs typeface="微软雅黑"/>
+              </a:rPr>
+              <a:t>高德 Key 缺失或配额耗尽</a:t>
+            </a:r>
+          </a:p>
+        </p:txBody>
+      </p:sp>
+      <p:sp>
+        <p:nvSpPr>
+          <p:cNvPr id="31" name="TextBox 30"/>
+          <p:cNvSpPr txBox="1"/>
+          <p:nvPr/>
+        </p:nvSpPr>
+        <p:spPr>
+          <a:xfrm>
+            <a:off x="3749039" y="3383280"/>
+            <a:ext cx="4023360" cy="320040"/>
+          </a:xfrm>
+          <a:prstGeom prst="rect">
+            <a:avLst/>
+          </a:prstGeom>
+          <a:noFill/>
+        </p:spPr>
+        <p:txBody>
+          <a:bodyPr wrap="square" anchor="t" lIns="0" rIns="0" tIns="0" bIns="0">
+            <a:noAutofit/>
+          </a:bodyPr>
+          <a:lstStyle/>
+          <a:p>
+            <a:pPr algn="l">
+              <a:lnSpc>
+                <a:spcPct val="118000"/>
+              </a:lnSpc>
+              <a:spcBef>
+                <a:spcPts val="0"/>
+              </a:spcBef>
+              <a:spcAft>
+                <a:spcPts val="0"/>
+              </a:spcAft>
+            </a:pPr>
+            <a:r>
+              <a:rPr sz="930" b="0" i="0">
+                <a:solidFill>
+                  <a:srgbClr val="333A4D"/>
+                </a:solidFill>
+                <a:latin typeface="微软雅黑"/>
+                <a:ea typeface="微软雅黑"/>
+                <a:cs typeface="微软雅黑"/>
+              </a:rPr>
+              <a:t>返回内置离线 POI 样例，标记 degraded=true</a:t>
+            </a:r>
+          </a:p>
+        </p:txBody>
+      </p:sp>
+      <p:sp>
+        <p:nvSpPr>
+          <p:cNvPr id="32" name="TextBox 31"/>
+          <p:cNvSpPr txBox="1"/>
+          <p:nvPr/>
+        </p:nvSpPr>
+        <p:spPr>
+          <a:xfrm>
+            <a:off x="8046720" y="3383280"/>
+            <a:ext cx="3438144" cy="320040"/>
+          </a:xfrm>
+          <a:prstGeom prst="rect">
+            <a:avLst/>
+          </a:prstGeom>
+          <a:noFill/>
+        </p:spPr>
+        <p:txBody>
+          <a:bodyPr wrap="square" anchor="t" lIns="0" rIns="0" tIns="0" bIns="0">
+            <a:noAutofit/>
+          </a:bodyPr>
+          <a:lstStyle/>
+          <a:p>
+            <a:pPr algn="l">
+              <a:lnSpc>
+                <a:spcPct val="118000"/>
+              </a:lnSpc>
+              <a:spcBef>
+                <a:spcPts val="0"/>
+              </a:spcBef>
+              <a:spcAft>
+                <a:spcPts val="0"/>
+              </a:spcAft>
+            </a:pPr>
+            <a:r>
+              <a:rPr sz="930" b="0" i="0">
+                <a:solidFill>
+                  <a:srgbClr val="333A4D"/>
+                </a:solidFill>
+                <a:latin typeface="微软雅黑"/>
+                <a:ea typeface="微软雅黑"/>
+                <a:cs typeface="微软雅黑"/>
+              </a:rPr>
+              <a:t>附近页照常可用，标注数据来源</a:t>
+            </a:r>
+          </a:p>
+        </p:txBody>
+      </p:sp>
+      <p:sp>
+        <p:nvSpPr>
+          <p:cNvPr id="33" name="Rounded Rectangle 32"/>
           <p:cNvSpPr/>
           <p:nvPr/>
         </p:nvSpPr>
         <p:spPr>
           <a:xfrm>
-            <a:off x="566928" y="1444752"/>
-            <a:ext cx="2670048" cy="50292"/>
-          </a:xfrm>
-          <a:prstGeom prst="rect">
-            <a:avLst/>
+            <a:off x="566928" y="3808476"/>
+            <a:ext cx="11027663" cy="448056"/>
+          </a:xfrm>
+          <a:prstGeom prst="roundRect">
+            <a:avLst>
+              <a:gd name="adj" fmla="val 2799"/>
+            </a:avLst>
           </a:prstGeom>
           <a:solidFill>
-            <a:srgbClr val="F97316"/>
+            <a:srgbClr val="FBF7F3"/>
           </a:solidFill>
-          <a:ln>
-            <a:noFill/>
+          <a:ln w="9525">
+            <a:solidFill>
+              <a:srgbClr val="EBE0D6"/>
+            </a:solidFill>
           </a:ln>
           <a:effectLst/>
         </p:spPr>
@@ -4530,94 +5655,86 @@
       </p:sp>
       <p:sp>
         <p:nvSpPr>
-          <p:cNvPr id="11" name="TextBox 10"/>
-          <p:cNvSpPr txBox="1"/>
-          <p:nvPr/>
-        </p:nvSpPr>
-        <p:spPr>
-          <a:xfrm>
-            <a:off x="749808" y="1682496"/>
-            <a:ext cx="2304288" cy="502920"/>
-          </a:xfrm>
-          <a:prstGeom prst="rect">
-            <a:avLst/>
-          </a:prstGeom>
-          <a:noFill/>
-        </p:spPr>
-        <p:txBody>
-          <a:bodyPr wrap="square" anchor="t" lIns="0" rIns="0" tIns="0" bIns="0">
-            <a:noAutofit/>
-          </a:bodyPr>
-          <a:lstStyle/>
-          <a:p>
-            <a:pPr algn="l">
-              <a:lnSpc>
-                <a:spcPct val="100000"/>
-              </a:lnSpc>
-              <a:spcAft>
-                <a:spcPts val="0"/>
-              </a:spcAft>
-            </a:pPr>
-            <a:r>
-              <a:rPr sz="2700" b="1" i="0">
-                <a:solidFill>
-                  <a:srgbClr val="F97316"/>
-                </a:solidFill>
-                <a:latin typeface="微软雅黑"/>
-                <a:ea typeface="微软雅黑"/>
-                <a:cs typeface="微软雅黑"/>
-              </a:rPr>
-              <a:t>196</a:t>
-            </a:r>
-            <a:r>
-              <a:rPr sz="1100" b="0" i="0">
-                <a:solidFill>
-                  <a:srgbClr val="6E7686"/>
-                </a:solidFill>
-                <a:latin typeface="微软雅黑"/>
-                <a:ea typeface="微软雅黑"/>
-                <a:cs typeface="微软雅黑"/>
-              </a:rPr>
-              <a:t>项</a:t>
-            </a:r>
-          </a:p>
-        </p:txBody>
-      </p:sp>
-      <p:sp>
-        <p:nvSpPr>
-          <p:cNvPr id="12" name="TextBox 11"/>
-          <p:cNvSpPr txBox="1"/>
-          <p:nvPr/>
-        </p:nvSpPr>
-        <p:spPr>
-          <a:xfrm>
-            <a:off x="749808" y="2212848"/>
-            <a:ext cx="2304288" cy="256032"/>
-          </a:xfrm>
-          <a:prstGeom prst="rect">
-            <a:avLst/>
-          </a:prstGeom>
-          <a:noFill/>
-        </p:spPr>
-        <p:txBody>
-          <a:bodyPr wrap="square" anchor="t" lIns="0" rIns="0" tIns="0" bIns="0">
-            <a:noAutofit/>
-          </a:bodyPr>
-          <a:lstStyle/>
-          <a:p>
-            <a:pPr algn="l">
-              <a:lnSpc>
-                <a:spcPct val="128000"/>
-              </a:lnSpc>
-              <a:spcBef>
-                <a:spcPts val="0"/>
-              </a:spcBef>
-              <a:spcAft>
-                <a:spcPts val="0"/>
-              </a:spcAft>
-            </a:pPr>
-            <a:r>
-              <a:rPr sz="1100" b="1" i="0">
+          <p:cNvPr id="34" name="TextBox 33"/>
+          <p:cNvSpPr txBox="1"/>
+          <p:nvPr/>
+        </p:nvSpPr>
+        <p:spPr>
+          <a:xfrm>
+            <a:off x="731520" y="3881628"/>
+            <a:ext cx="2743200" cy="320040"/>
+          </a:xfrm>
+          <a:prstGeom prst="rect">
+            <a:avLst/>
+          </a:prstGeom>
+          <a:noFill/>
+        </p:spPr>
+        <p:txBody>
+          <a:bodyPr wrap="square" anchor="t" lIns="0" rIns="0" tIns="0" bIns="0">
+            <a:noAutofit/>
+          </a:bodyPr>
+          <a:lstStyle/>
+          <a:p>
+            <a:pPr algn="l">
+              <a:lnSpc>
+                <a:spcPct val="118000"/>
+              </a:lnSpc>
+              <a:spcBef>
+                <a:spcPts val="0"/>
+              </a:spcBef>
+              <a:spcAft>
+                <a:spcPts val="0"/>
+              </a:spcAft>
+            </a:pPr>
+            <a:r>
+              <a:rPr sz="930" b="1" i="0">
+                <a:solidFill>
+                  <a:srgbClr val="1B2030"/>
+                </a:solidFill>
+                <a:latin typeface="微软雅黑"/>
+                <a:ea typeface="微软雅黑"/>
+                <a:cs typeface="微软雅黑"/>
+              </a:rPr>
+              <a:t>LLM 不可用 / 超时</a:t>
+            </a:r>
+          </a:p>
+        </p:txBody>
+      </p:sp>
+      <p:sp>
+        <p:nvSpPr>
+          <p:cNvPr id="35" name="TextBox 34"/>
+          <p:cNvSpPr txBox="1"/>
+          <p:nvPr/>
+        </p:nvSpPr>
+        <p:spPr>
+          <a:xfrm>
+            <a:off x="3749039" y="3881628"/>
+            <a:ext cx="4023360" cy="320040"/>
+          </a:xfrm>
+          <a:prstGeom prst="rect">
+            <a:avLst/>
+          </a:prstGeom>
+          <a:noFill/>
+        </p:spPr>
+        <p:txBody>
+          <a:bodyPr wrap="square" anchor="t" lIns="0" rIns="0" tIns="0" bIns="0">
+            <a:noAutofit/>
+          </a:bodyPr>
+          <a:lstStyle/>
+          <a:p>
+            <a:pPr algn="l">
+              <a:lnSpc>
+                <a:spcPct val="118000"/>
+              </a:lnSpc>
+              <a:spcBef>
+                <a:spcPts val="0"/>
+              </a:spcBef>
+              <a:spcAft>
+                <a:spcPts val="0"/>
+              </a:spcAft>
+            </a:pPr>
+            <a:r>
+              <a:rPr sz="930" b="0" i="0">
                 <a:solidFill>
                   <a:srgbClr val="333A4D"/>
                 </a:solidFill>
@@ -4625,25 +5742,72 @@
                 <a:ea typeface="微软雅黑"/>
                 <a:cs typeface="微软雅黑"/>
               </a:rPr>
-              <a:t>pytest 全绿</a:t>
-            </a:r>
-          </a:p>
-        </p:txBody>
-      </p:sp>
-      <p:sp>
-        <p:nvSpPr>
-          <p:cNvPr id="13" name="Rounded Rectangle 12"/>
+              <a:t>助手降级为检索式回答，引用照常返回</a:t>
+            </a:r>
+          </a:p>
+        </p:txBody>
+      </p:sp>
+      <p:sp>
+        <p:nvSpPr>
+          <p:cNvPr id="36" name="TextBox 35"/>
+          <p:cNvSpPr txBox="1"/>
+          <p:nvPr/>
+        </p:nvSpPr>
+        <p:spPr>
+          <a:xfrm>
+            <a:off x="8046720" y="3881628"/>
+            <a:ext cx="3438144" cy="320040"/>
+          </a:xfrm>
+          <a:prstGeom prst="rect">
+            <a:avLst/>
+          </a:prstGeom>
+          <a:noFill/>
+        </p:spPr>
+        <p:txBody>
+          <a:bodyPr wrap="square" anchor="t" lIns="0" rIns="0" tIns="0" bIns="0">
+            <a:noAutofit/>
+          </a:bodyPr>
+          <a:lstStyle/>
+          <a:p>
+            <a:pPr algn="l">
+              <a:lnSpc>
+                <a:spcPct val="118000"/>
+              </a:lnSpc>
+              <a:spcBef>
+                <a:spcPts val="0"/>
+              </a:spcBef>
+              <a:spcAft>
+                <a:spcPts val="0"/>
+              </a:spcAft>
+            </a:pPr>
+            <a:r>
+              <a:rPr sz="930" b="0" i="0">
+                <a:solidFill>
+                  <a:srgbClr val="333A4D"/>
+                </a:solidFill>
+                <a:latin typeface="微软雅黑"/>
+                <a:ea typeface="微软雅黑"/>
+                <a:cs typeface="微软雅黑"/>
+              </a:rPr>
+              <a:t>回答变简洁，结论仍可溯源</a:t>
+            </a:r>
+          </a:p>
+        </p:txBody>
+      </p:sp>
+      <p:sp>
+        <p:nvSpPr>
+          <p:cNvPr id="37" name="Rounded Rectangle 36"/>
           <p:cNvSpPr/>
           <p:nvPr/>
         </p:nvSpPr>
         <p:spPr>
           <a:xfrm>
-            <a:off x="3410712" y="1444752"/>
-            <a:ext cx="2670048" cy="1298448"/>
+            <a:off x="566928" y="4306824"/>
+            <a:ext cx="11027663" cy="448056"/>
           </a:xfrm>
           <a:prstGeom prst="roundRect">
             <a:avLst>
-              <a:gd name="adj" fmla="val 8000"/>
+              <a:gd name="adj" fmla="val 2799"/>
             </a:avLst>
           </a:prstGeom>
           <a:solidFill>
@@ -4655,13 +5819,6 @@
             </a:solidFill>
           </a:ln>
           <a:effectLst/>
-          <a:effectLst>
-            <a:outerShdw blurRad="114300" dist="50800" dir="5400000" rotWithShape="0">
-              <a:srgbClr val="40210A">
-                <a:alpha val="11000"/>
-              </a:srgbClr>
-            </a:outerShdw>
-          </a:effectLst>
         </p:spPr>
         <p:style>
           <a:lnRef idx="1">
@@ -4687,23 +5844,168 @@
       </p:sp>
       <p:sp>
         <p:nvSpPr>
-          <p:cNvPr id="14" name="Rectangle 13"/>
+          <p:cNvPr id="38" name="TextBox 37"/>
+          <p:cNvSpPr txBox="1"/>
+          <p:nvPr/>
+        </p:nvSpPr>
+        <p:spPr>
+          <a:xfrm>
+            <a:off x="731520" y="4379976"/>
+            <a:ext cx="2743200" cy="320040"/>
+          </a:xfrm>
+          <a:prstGeom prst="rect">
+            <a:avLst/>
+          </a:prstGeom>
+          <a:noFill/>
+        </p:spPr>
+        <p:txBody>
+          <a:bodyPr wrap="square" anchor="t" lIns="0" rIns="0" tIns="0" bIns="0">
+            <a:noAutofit/>
+          </a:bodyPr>
+          <a:lstStyle/>
+          <a:p>
+            <a:pPr algn="l">
+              <a:lnSpc>
+                <a:spcPct val="118000"/>
+              </a:lnSpc>
+              <a:spcBef>
+                <a:spcPts val="0"/>
+              </a:spcBef>
+              <a:spcAft>
+                <a:spcPts val="0"/>
+              </a:spcAft>
+            </a:pPr>
+            <a:r>
+              <a:rPr sz="930" b="1" i="0">
+                <a:solidFill>
+                  <a:srgbClr val="1B2030"/>
+                </a:solidFill>
+                <a:latin typeface="微软雅黑"/>
+                <a:ea typeface="微软雅黑"/>
+                <a:cs typeface="微软雅黑"/>
+              </a:rPr>
+              <a:t>RAG 索引未构建</a:t>
+            </a:r>
+          </a:p>
+        </p:txBody>
+      </p:sp>
+      <p:sp>
+        <p:nvSpPr>
+          <p:cNvPr id="39" name="TextBox 38"/>
+          <p:cNvSpPr txBox="1"/>
+          <p:nvPr/>
+        </p:nvSpPr>
+        <p:spPr>
+          <a:xfrm>
+            <a:off x="3749039" y="4379976"/>
+            <a:ext cx="4023360" cy="320040"/>
+          </a:xfrm>
+          <a:prstGeom prst="rect">
+            <a:avLst/>
+          </a:prstGeom>
+          <a:noFill/>
+        </p:spPr>
+        <p:txBody>
+          <a:bodyPr wrap="square" anchor="t" lIns="0" rIns="0" tIns="0" bIns="0">
+            <a:noAutofit/>
+          </a:bodyPr>
+          <a:lstStyle/>
+          <a:p>
+            <a:pPr algn="l">
+              <a:lnSpc>
+                <a:spcPct val="118000"/>
+              </a:lnSpc>
+              <a:spcBef>
+                <a:spcPts val="0"/>
+              </a:spcBef>
+              <a:spcAft>
+                <a:spcPts val="0"/>
+              </a:spcAft>
+            </a:pPr>
+            <a:r>
+              <a:rPr sz="930" b="0" i="0">
+                <a:solidFill>
+                  <a:srgbClr val="333A4D"/>
+                </a:solidFill>
+                <a:latin typeface="微软雅黑"/>
+                <a:ea typeface="微软雅黑"/>
+                <a:cs typeface="微软雅黑"/>
+              </a:rPr>
+              <a:t>语义检索退化为关键词检索，不抛 500</a:t>
+            </a:r>
+          </a:p>
+        </p:txBody>
+      </p:sp>
+      <p:sp>
+        <p:nvSpPr>
+          <p:cNvPr id="40" name="TextBox 39"/>
+          <p:cNvSpPr txBox="1"/>
+          <p:nvPr/>
+        </p:nvSpPr>
+        <p:spPr>
+          <a:xfrm>
+            <a:off x="8046720" y="4379976"/>
+            <a:ext cx="3438144" cy="320040"/>
+          </a:xfrm>
+          <a:prstGeom prst="rect">
+            <a:avLst/>
+          </a:prstGeom>
+          <a:noFill/>
+        </p:spPr>
+        <p:txBody>
+          <a:bodyPr wrap="square" anchor="t" lIns="0" rIns="0" tIns="0" bIns="0">
+            <a:noAutofit/>
+          </a:bodyPr>
+          <a:lstStyle/>
+          <a:p>
+            <a:pPr algn="l">
+              <a:lnSpc>
+                <a:spcPct val="118000"/>
+              </a:lnSpc>
+              <a:spcBef>
+                <a:spcPts val="0"/>
+              </a:spcBef>
+              <a:spcAft>
+                <a:spcPts val="0"/>
+              </a:spcAft>
+            </a:pPr>
+            <a:r>
+              <a:rPr sz="930" b="0" i="0">
+                <a:solidFill>
+                  <a:srgbClr val="333A4D"/>
+                </a:solidFill>
+                <a:latin typeface="微软雅黑"/>
+                <a:ea typeface="微软雅黑"/>
+                <a:cs typeface="微软雅黑"/>
+              </a:rPr>
+              <a:t>搜索仍可用，精度略降</a:t>
+            </a:r>
+          </a:p>
+        </p:txBody>
+      </p:sp>
+      <p:sp>
+        <p:nvSpPr>
+          <p:cNvPr id="41" name="Rounded Rectangle 40"/>
           <p:cNvSpPr/>
           <p:nvPr/>
         </p:nvSpPr>
         <p:spPr>
           <a:xfrm>
-            <a:off x="3410712" y="1444752"/>
-            <a:ext cx="2670048" cy="50292"/>
-          </a:xfrm>
-          <a:prstGeom prst="rect">
-            <a:avLst/>
+            <a:off x="566928" y="4805172"/>
+            <a:ext cx="11027663" cy="448056"/>
+          </a:xfrm>
+          <a:prstGeom prst="roundRect">
+            <a:avLst>
+              <a:gd name="adj" fmla="val 2799"/>
+            </a:avLst>
           </a:prstGeom>
           <a:solidFill>
-            <a:srgbClr val="F97316"/>
+            <a:srgbClr val="FBF7F3"/>
           </a:solidFill>
-          <a:ln>
-            <a:noFill/>
+          <a:ln w="9525">
+            <a:solidFill>
+              <a:srgbClr val="EBE0D6"/>
+            </a:solidFill>
           </a:ln>
           <a:effectLst/>
         </p:spPr>
@@ -4731,94 +6033,86 @@
       </p:sp>
       <p:sp>
         <p:nvSpPr>
-          <p:cNvPr id="15" name="TextBox 14"/>
-          <p:cNvSpPr txBox="1"/>
-          <p:nvPr/>
-        </p:nvSpPr>
-        <p:spPr>
-          <a:xfrm>
-            <a:off x="3593592" y="1682496"/>
-            <a:ext cx="2304288" cy="502920"/>
-          </a:xfrm>
-          <a:prstGeom prst="rect">
-            <a:avLst/>
-          </a:prstGeom>
-          <a:noFill/>
-        </p:spPr>
-        <p:txBody>
-          <a:bodyPr wrap="square" anchor="t" lIns="0" rIns="0" tIns="0" bIns="0">
-            <a:noAutofit/>
-          </a:bodyPr>
-          <a:lstStyle/>
-          <a:p>
-            <a:pPr algn="l">
-              <a:lnSpc>
-                <a:spcPct val="100000"/>
-              </a:lnSpc>
-              <a:spcAft>
-                <a:spcPts val="0"/>
-              </a:spcAft>
-            </a:pPr>
-            <a:r>
-              <a:rPr sz="2700" b="1" i="0">
-                <a:solidFill>
-                  <a:srgbClr val="F97316"/>
-                </a:solidFill>
-                <a:latin typeface="微软雅黑"/>
-                <a:ea typeface="微软雅黑"/>
-                <a:cs typeface="微软雅黑"/>
-              </a:rPr>
-              <a:t>74</a:t>
-            </a:r>
-            <a:r>
-              <a:rPr sz="1100" b="0" i="0">
-                <a:solidFill>
-                  <a:srgbClr val="6E7686"/>
-                </a:solidFill>
-                <a:latin typeface="微软雅黑"/>
-                <a:ea typeface="微软雅黑"/>
-                <a:cs typeface="微软雅黑"/>
-              </a:rPr>
-              <a:t>个</a:t>
-            </a:r>
-          </a:p>
-        </p:txBody>
-      </p:sp>
-      <p:sp>
-        <p:nvSpPr>
-          <p:cNvPr id="16" name="TextBox 15"/>
-          <p:cNvSpPr txBox="1"/>
-          <p:nvPr/>
-        </p:nvSpPr>
-        <p:spPr>
-          <a:xfrm>
-            <a:off x="3593592" y="2212848"/>
-            <a:ext cx="2304288" cy="256032"/>
-          </a:xfrm>
-          <a:prstGeom prst="rect">
-            <a:avLst/>
-          </a:prstGeom>
-          <a:noFill/>
-        </p:spPr>
-        <p:txBody>
-          <a:bodyPr wrap="square" anchor="t" lIns="0" rIns="0" tIns="0" bIns="0">
-            <a:noAutofit/>
-          </a:bodyPr>
-          <a:lstStyle/>
-          <a:p>
-            <a:pPr algn="l">
-              <a:lnSpc>
-                <a:spcPct val="128000"/>
-              </a:lnSpc>
-              <a:spcBef>
-                <a:spcPts val="0"/>
-              </a:spcBef>
-              <a:spcAft>
-                <a:spcPts val="0"/>
-              </a:spcAft>
-            </a:pPr>
-            <a:r>
-              <a:rPr sz="1100" b="1" i="0">
+          <p:cNvPr id="42" name="TextBox 41"/>
+          <p:cNvSpPr txBox="1"/>
+          <p:nvPr/>
+        </p:nvSpPr>
+        <p:spPr>
+          <a:xfrm>
+            <a:off x="731520" y="4878324"/>
+            <a:ext cx="2743200" cy="320040"/>
+          </a:xfrm>
+          <a:prstGeom prst="rect">
+            <a:avLst/>
+          </a:prstGeom>
+          <a:noFill/>
+        </p:spPr>
+        <p:txBody>
+          <a:bodyPr wrap="square" anchor="t" lIns="0" rIns="0" tIns="0" bIns="0">
+            <a:noAutofit/>
+          </a:bodyPr>
+          <a:lstStyle/>
+          <a:p>
+            <a:pPr algn="l">
+              <a:lnSpc>
+                <a:spcPct val="118000"/>
+              </a:lnSpc>
+              <a:spcBef>
+                <a:spcPts val="0"/>
+              </a:spcBef>
+              <a:spcAft>
+                <a:spcPts val="0"/>
+              </a:spcAft>
+            </a:pPr>
+            <a:r>
+              <a:rPr sz="930" b="1" i="0">
+                <a:solidFill>
+                  <a:srgbClr val="1B2030"/>
+                </a:solidFill>
+                <a:latin typeface="微软雅黑"/>
+                <a:ea typeface="微软雅黑"/>
+                <a:cs typeface="微软雅黑"/>
+              </a:rPr>
+              <a:t>外网断开</a:t>
+            </a:r>
+          </a:p>
+        </p:txBody>
+      </p:sp>
+      <p:sp>
+        <p:nvSpPr>
+          <p:cNvPr id="43" name="TextBox 42"/>
+          <p:cNvSpPr txBox="1"/>
+          <p:nvPr/>
+        </p:nvSpPr>
+        <p:spPr>
+          <a:xfrm>
+            <a:off x="3749039" y="4878324"/>
+            <a:ext cx="4023360" cy="320040"/>
+          </a:xfrm>
+          <a:prstGeom prst="rect">
+            <a:avLst/>
+          </a:prstGeom>
+          <a:noFill/>
+        </p:spPr>
+        <p:txBody>
+          <a:bodyPr wrap="square" anchor="t" lIns="0" rIns="0" tIns="0" bIns="0">
+            <a:noAutofit/>
+          </a:bodyPr>
+          <a:lstStyle/>
+          <a:p>
+            <a:pPr algn="l">
+              <a:lnSpc>
+                <a:spcPct val="118000"/>
+              </a:lnSpc>
+              <a:spcBef>
+                <a:spcPts val="0"/>
+              </a:spcBef>
+              <a:spcAft>
+                <a:spcPts val="0"/>
+              </a:spcAft>
+            </a:pPr>
+            <a:r>
+              <a:rPr sz="930" b="0" i="0">
                 <a:solidFill>
                   <a:srgbClr val="333A4D"/>
                 </a:solidFill>
@@ -4826,25 +6120,72 @@
                 <a:ea typeface="微软雅黑"/>
                 <a:cs typeface="微软雅黑"/>
               </a:rPr>
-              <a:t>Python 模块</a:t>
-            </a:r>
-          </a:p>
-        </p:txBody>
-      </p:sp>
-      <p:sp>
-        <p:nvSpPr>
-          <p:cNvPr id="17" name="Rounded Rectangle 16"/>
+              <a:t>websearch 读取本地 fixtures 并标记</a:t>
+            </a:r>
+          </a:p>
+        </p:txBody>
+      </p:sp>
+      <p:sp>
+        <p:nvSpPr>
+          <p:cNvPr id="44" name="TextBox 43"/>
+          <p:cNvSpPr txBox="1"/>
+          <p:nvPr/>
+        </p:nvSpPr>
+        <p:spPr>
+          <a:xfrm>
+            <a:off x="8046720" y="4878324"/>
+            <a:ext cx="3438144" cy="320040"/>
+          </a:xfrm>
+          <a:prstGeom prst="rect">
+            <a:avLst/>
+          </a:prstGeom>
+          <a:noFill/>
+        </p:spPr>
+        <p:txBody>
+          <a:bodyPr wrap="square" anchor="t" lIns="0" rIns="0" tIns="0" bIns="0">
+            <a:noAutofit/>
+          </a:bodyPr>
+          <a:lstStyle/>
+          <a:p>
+            <a:pPr algn="l">
+              <a:lnSpc>
+                <a:spcPct val="118000"/>
+              </a:lnSpc>
+              <a:spcBef>
+                <a:spcPts val="0"/>
+              </a:spcBef>
+              <a:spcAft>
+                <a:spcPts val="0"/>
+              </a:spcAft>
+            </a:pPr>
+            <a:r>
+              <a:rPr sz="930" b="0" i="0">
+                <a:solidFill>
+                  <a:srgbClr val="333A4D"/>
+                </a:solidFill>
+                <a:latin typeface="微软雅黑"/>
+                <a:ea typeface="微软雅黑"/>
+                <a:cs typeface="微软雅黑"/>
+              </a:rPr>
+              <a:t>演示链路不断</a:t>
+            </a:r>
+          </a:p>
+        </p:txBody>
+      </p:sp>
+      <p:sp>
+        <p:nvSpPr>
+          <p:cNvPr id="45" name="Rounded Rectangle 44"/>
           <p:cNvSpPr/>
           <p:nvPr/>
         </p:nvSpPr>
         <p:spPr>
           <a:xfrm>
-            <a:off x="6254496" y="1444752"/>
-            <a:ext cx="2670048" cy="1298448"/>
+            <a:off x="566928" y="5303520"/>
+            <a:ext cx="11027663" cy="448056"/>
           </a:xfrm>
           <a:prstGeom prst="roundRect">
             <a:avLst>
-              <a:gd name="adj" fmla="val 8000"/>
+              <a:gd name="adj" fmla="val 2799"/>
             </a:avLst>
           </a:prstGeom>
           <a:solidFill>
@@ -4856,13 +6197,6 @@
             </a:solidFill>
           </a:ln>
           <a:effectLst/>
-          <a:effectLst>
-            <a:outerShdw blurRad="114300" dist="50800" dir="5400000" rotWithShape="0">
-              <a:srgbClr val="40210A">
-                <a:alpha val="11000"/>
-              </a:srgbClr>
-            </a:outerShdw>
-          </a:effectLst>
         </p:spPr>
         <p:style>
           <a:lnRef idx="1">
@@ -4888,138 +6222,86 @@
       </p:sp>
       <p:sp>
         <p:nvSpPr>
-          <p:cNvPr id="18" name="Rectangle 17"/>
-          <p:cNvSpPr/>
-          <p:nvPr/>
-        </p:nvSpPr>
-        <p:spPr>
-          <a:xfrm>
-            <a:off x="6254496" y="1444752"/>
-            <a:ext cx="2670048" cy="50292"/>
-          </a:xfrm>
-          <a:prstGeom prst="rect">
-            <a:avLst/>
-          </a:prstGeom>
-          <a:solidFill>
-            <a:srgbClr val="0F9B8E"/>
-          </a:solidFill>
-          <a:ln>
-            <a:noFill/>
-          </a:ln>
-          <a:effectLst/>
-        </p:spPr>
-        <p:style>
-          <a:lnRef idx="1">
-            <a:schemeClr val="accent1"/>
-          </a:lnRef>
-          <a:fillRef idx="3">
-            <a:schemeClr val="accent1"/>
-          </a:fillRef>
-          <a:effectRef idx="2">
-            <a:schemeClr val="accent1"/>
-          </a:effectRef>
-          <a:fontRef idx="minor">
-            <a:schemeClr val="lt1"/>
-          </a:fontRef>
-        </p:style>
-        <p:txBody>
-          <a:bodyPr rtlCol="0" anchor="ctr" wrap="square"/>
-          <a:lstStyle/>
-          <a:p>
-            <a:pPr algn="ctr"/>
-          </a:p>
-        </p:txBody>
-      </p:sp>
-      <p:sp>
-        <p:nvSpPr>
-          <p:cNvPr id="19" name="TextBox 18"/>
-          <p:cNvSpPr txBox="1"/>
-          <p:nvPr/>
-        </p:nvSpPr>
-        <p:spPr>
-          <a:xfrm>
-            <a:off x="6437376" y="1682496"/>
-            <a:ext cx="2304288" cy="502920"/>
-          </a:xfrm>
-          <a:prstGeom prst="rect">
-            <a:avLst/>
-          </a:prstGeom>
-          <a:noFill/>
-        </p:spPr>
-        <p:txBody>
-          <a:bodyPr wrap="square" anchor="t" lIns="0" rIns="0" tIns="0" bIns="0">
-            <a:noAutofit/>
-          </a:bodyPr>
-          <a:lstStyle/>
-          <a:p>
-            <a:pPr algn="l">
-              <a:lnSpc>
-                <a:spcPct val="100000"/>
-              </a:lnSpc>
-              <a:spcAft>
-                <a:spcPts val="0"/>
-              </a:spcAft>
-            </a:pPr>
-            <a:r>
-              <a:rPr sz="2700" b="1" i="0">
-                <a:solidFill>
-                  <a:srgbClr val="0F9B8E"/>
-                </a:solidFill>
-                <a:latin typeface="微软雅黑"/>
-                <a:ea typeface="微软雅黑"/>
-                <a:cs typeface="微软雅黑"/>
-              </a:rPr>
-              <a:t>15,752</a:t>
-            </a:r>
-            <a:r>
-              <a:rPr sz="1100" b="0" i="0">
-                <a:solidFill>
-                  <a:srgbClr val="6E7686"/>
-                </a:solidFill>
-                <a:latin typeface="微软雅黑"/>
-                <a:ea typeface="微软雅黑"/>
-                <a:cs typeface="微软雅黑"/>
-              </a:rPr>
-              <a:t>行</a:t>
-            </a:r>
-          </a:p>
-        </p:txBody>
-      </p:sp>
-      <p:sp>
-        <p:nvSpPr>
-          <p:cNvPr id="20" name="TextBox 19"/>
-          <p:cNvSpPr txBox="1"/>
-          <p:nvPr/>
-        </p:nvSpPr>
-        <p:spPr>
-          <a:xfrm>
-            <a:off x="6437376" y="2212848"/>
-            <a:ext cx="2304288" cy="256032"/>
-          </a:xfrm>
-          <a:prstGeom prst="rect">
-            <a:avLst/>
-          </a:prstGeom>
-          <a:noFill/>
-        </p:spPr>
-        <p:txBody>
-          <a:bodyPr wrap="square" anchor="t" lIns="0" rIns="0" tIns="0" bIns="0">
-            <a:noAutofit/>
-          </a:bodyPr>
-          <a:lstStyle/>
-          <a:p>
-            <a:pPr algn="l">
-              <a:lnSpc>
-                <a:spcPct val="128000"/>
-              </a:lnSpc>
-              <a:spcBef>
-                <a:spcPts val="0"/>
-              </a:spcBef>
-              <a:spcAft>
-                <a:spcPts val="0"/>
-              </a:spcAft>
-            </a:pPr>
-            <a:r>
-              <a:rPr sz="1100" b="1" i="0">
+          <p:cNvPr id="46" name="TextBox 45"/>
+          <p:cNvSpPr txBox="1"/>
+          <p:nvPr/>
+        </p:nvSpPr>
+        <p:spPr>
+          <a:xfrm>
+            <a:off x="731520" y="5376672"/>
+            <a:ext cx="2743200" cy="320040"/>
+          </a:xfrm>
+          <a:prstGeom prst="rect">
+            <a:avLst/>
+          </a:prstGeom>
+          <a:noFill/>
+        </p:spPr>
+        <p:txBody>
+          <a:bodyPr wrap="square" anchor="t" lIns="0" rIns="0" tIns="0" bIns="0">
+            <a:noAutofit/>
+          </a:bodyPr>
+          <a:lstStyle/>
+          <a:p>
+            <a:pPr algn="l">
+              <a:lnSpc>
+                <a:spcPct val="118000"/>
+              </a:lnSpc>
+              <a:spcBef>
+                <a:spcPts val="0"/>
+              </a:spcBef>
+              <a:spcAft>
+                <a:spcPts val="0"/>
+              </a:spcAft>
+            </a:pPr>
+            <a:r>
+              <a:rPr sz="930" b="1" i="0">
+                <a:solidFill>
+                  <a:srgbClr val="1B2030"/>
+                </a:solidFill>
+                <a:latin typeface="微软雅黑"/>
+                <a:ea typeface="微软雅黑"/>
+                <a:cs typeface="微软雅黑"/>
+              </a:rPr>
+              <a:t>数据库方言差异</a:t>
+            </a:r>
+          </a:p>
+        </p:txBody>
+      </p:sp>
+      <p:sp>
+        <p:nvSpPr>
+          <p:cNvPr id="47" name="TextBox 46"/>
+          <p:cNvSpPr txBox="1"/>
+          <p:nvPr/>
+        </p:nvSpPr>
+        <p:spPr>
+          <a:xfrm>
+            <a:off x="3749039" y="5376672"/>
+            <a:ext cx="4023360" cy="320040"/>
+          </a:xfrm>
+          <a:prstGeom prst="rect">
+            <a:avLst/>
+          </a:prstGeom>
+          <a:noFill/>
+        </p:spPr>
+        <p:txBody>
+          <a:bodyPr wrap="square" anchor="t" lIns="0" rIns="0" tIns="0" bIns="0">
+            <a:noAutofit/>
+          </a:bodyPr>
+          <a:lstStyle/>
+          <a:p>
+            <a:pPr algn="l">
+              <a:lnSpc>
+                <a:spcPct val="118000"/>
+              </a:lnSpc>
+              <a:spcBef>
+                <a:spcPts val="0"/>
+              </a:spcBef>
+              <a:spcAft>
+                <a:spcPts val="0"/>
+              </a:spcAft>
+            </a:pPr>
+            <a:r>
+              <a:rPr sz="930" b="0" i="0">
                 <a:solidFill>
                   <a:srgbClr val="333A4D"/>
                 </a:solidFill>
@@ -5027,1292 +6309,6 @@
                 <a:ea typeface="微软雅黑"/>
                 <a:cs typeface="微软雅黑"/>
               </a:rPr>
-              <a:t>Python 代码</a:t>
-            </a:r>
-          </a:p>
-        </p:txBody>
-      </p:sp>
-      <p:sp>
-        <p:nvSpPr>
-          <p:cNvPr id="21" name="Rounded Rectangle 20"/>
-          <p:cNvSpPr/>
-          <p:nvPr/>
-        </p:nvSpPr>
-        <p:spPr>
-          <a:xfrm>
-            <a:off x="9098280" y="1444752"/>
-            <a:ext cx="2670048" cy="1298448"/>
-          </a:xfrm>
-          <a:prstGeom prst="roundRect">
-            <a:avLst>
-              <a:gd name="adj" fmla="val 8000"/>
-            </a:avLst>
-          </a:prstGeom>
-          <a:solidFill>
-            <a:srgbClr val="FFFFFF"/>
-          </a:solidFill>
-          <a:ln w="9525">
-            <a:solidFill>
-              <a:srgbClr val="EBE0D6"/>
-            </a:solidFill>
-          </a:ln>
-          <a:effectLst/>
-          <a:effectLst>
-            <a:outerShdw blurRad="114300" dist="50800" dir="5400000" rotWithShape="0">
-              <a:srgbClr val="40210A">
-                <a:alpha val="11000"/>
-              </a:srgbClr>
-            </a:outerShdw>
-          </a:effectLst>
-        </p:spPr>
-        <p:style>
-          <a:lnRef idx="1">
-            <a:schemeClr val="accent1"/>
-          </a:lnRef>
-          <a:fillRef idx="3">
-            <a:schemeClr val="accent1"/>
-          </a:fillRef>
-          <a:effectRef idx="2">
-            <a:schemeClr val="accent1"/>
-          </a:effectRef>
-          <a:fontRef idx="minor">
-            <a:schemeClr val="lt1"/>
-          </a:fontRef>
-        </p:style>
-        <p:txBody>
-          <a:bodyPr rtlCol="0" anchor="ctr" wrap="square"/>
-          <a:lstStyle/>
-          <a:p>
-            <a:pPr algn="ctr"/>
-          </a:p>
-        </p:txBody>
-      </p:sp>
-      <p:sp>
-        <p:nvSpPr>
-          <p:cNvPr id="22" name="Rectangle 21"/>
-          <p:cNvSpPr/>
-          <p:nvPr/>
-        </p:nvSpPr>
-        <p:spPr>
-          <a:xfrm>
-            <a:off x="9098280" y="1444752"/>
-            <a:ext cx="2670048" cy="50292"/>
-          </a:xfrm>
-          <a:prstGeom prst="rect">
-            <a:avLst/>
-          </a:prstGeom>
-          <a:solidFill>
-            <a:srgbClr val="0F9B8E"/>
-          </a:solidFill>
-          <a:ln>
-            <a:noFill/>
-          </a:ln>
-          <a:effectLst/>
-        </p:spPr>
-        <p:style>
-          <a:lnRef idx="1">
-            <a:schemeClr val="accent1"/>
-          </a:lnRef>
-          <a:fillRef idx="3">
-            <a:schemeClr val="accent1"/>
-          </a:fillRef>
-          <a:effectRef idx="2">
-            <a:schemeClr val="accent1"/>
-          </a:effectRef>
-          <a:fontRef idx="minor">
-            <a:schemeClr val="lt1"/>
-          </a:fontRef>
-        </p:style>
-        <p:txBody>
-          <a:bodyPr rtlCol="0" anchor="ctr" wrap="square"/>
-          <a:lstStyle/>
-          <a:p>
-            <a:pPr algn="ctr"/>
-          </a:p>
-        </p:txBody>
-      </p:sp>
-      <p:sp>
-        <p:nvSpPr>
-          <p:cNvPr id="23" name="TextBox 22"/>
-          <p:cNvSpPr txBox="1"/>
-          <p:nvPr/>
-        </p:nvSpPr>
-        <p:spPr>
-          <a:xfrm>
-            <a:off x="9281159" y="1682496"/>
-            <a:ext cx="2304288" cy="502920"/>
-          </a:xfrm>
-          <a:prstGeom prst="rect">
-            <a:avLst/>
-          </a:prstGeom>
-          <a:noFill/>
-        </p:spPr>
-        <p:txBody>
-          <a:bodyPr wrap="square" anchor="t" lIns="0" rIns="0" tIns="0" bIns="0">
-            <a:noAutofit/>
-          </a:bodyPr>
-          <a:lstStyle/>
-          <a:p>
-            <a:pPr algn="l">
-              <a:lnSpc>
-                <a:spcPct val="100000"/>
-              </a:lnSpc>
-              <a:spcAft>
-                <a:spcPts val="0"/>
-              </a:spcAft>
-            </a:pPr>
-            <a:r>
-              <a:rPr sz="2700" b="1" i="0">
-                <a:solidFill>
-                  <a:srgbClr val="0F9B8E"/>
-                </a:solidFill>
-                <a:latin typeface="微软雅黑"/>
-                <a:ea typeface="微软雅黑"/>
-                <a:cs typeface="微软雅黑"/>
-              </a:rPr>
-              <a:t>22,000</a:t>
-            </a:r>
-            <a:r>
-              <a:rPr sz="1100" b="0" i="0">
-                <a:solidFill>
-                  <a:srgbClr val="6E7686"/>
-                </a:solidFill>
-                <a:latin typeface="微软雅黑"/>
-                <a:ea typeface="微软雅黑"/>
-                <a:cs typeface="微软雅黑"/>
-              </a:rPr>
-              <a:t>行</a:t>
-            </a:r>
-          </a:p>
-        </p:txBody>
-      </p:sp>
-      <p:sp>
-        <p:nvSpPr>
-          <p:cNvPr id="24" name="TextBox 23"/>
-          <p:cNvSpPr txBox="1"/>
-          <p:nvPr/>
-        </p:nvSpPr>
-        <p:spPr>
-          <a:xfrm>
-            <a:off x="9281159" y="2212848"/>
-            <a:ext cx="2304288" cy="256032"/>
-          </a:xfrm>
-          <a:prstGeom prst="rect">
-            <a:avLst/>
-          </a:prstGeom>
-          <a:noFill/>
-        </p:spPr>
-        <p:txBody>
-          <a:bodyPr wrap="square" anchor="t" lIns="0" rIns="0" tIns="0" bIns="0">
-            <a:noAutofit/>
-          </a:bodyPr>
-          <a:lstStyle/>
-          <a:p>
-            <a:pPr algn="l">
-              <a:lnSpc>
-                <a:spcPct val="128000"/>
-              </a:lnSpc>
-              <a:spcBef>
-                <a:spcPts val="0"/>
-              </a:spcBef>
-              <a:spcAft>
-                <a:spcPts val="0"/>
-              </a:spcAft>
-            </a:pPr>
-            <a:r>
-              <a:rPr sz="1100" b="1" i="0">
-                <a:solidFill>
-                  <a:srgbClr val="333A4D"/>
-                </a:solidFill>
-                <a:latin typeface="微软雅黑"/>
-                <a:ea typeface="微软雅黑"/>
-                <a:cs typeface="微软雅黑"/>
-              </a:rPr>
-              <a:t>前端 JS/CSS</a:t>
-            </a:r>
-          </a:p>
-        </p:txBody>
-      </p:sp>
-      <p:sp>
-        <p:nvSpPr>
-          <p:cNvPr id="25" name="Rounded Rectangle 24"/>
-          <p:cNvSpPr/>
-          <p:nvPr/>
-        </p:nvSpPr>
-        <p:spPr>
-          <a:xfrm>
-            <a:off x="566928" y="2926080"/>
-            <a:ext cx="11027663" cy="347472"/>
-          </a:xfrm>
-          <a:prstGeom prst="roundRect">
-            <a:avLst>
-              <a:gd name="adj" fmla="val 4000"/>
-            </a:avLst>
-          </a:prstGeom>
-          <a:solidFill>
-            <a:srgbClr val="1B2030"/>
-          </a:solidFill>
-          <a:ln>
-            <a:noFill/>
-          </a:ln>
-          <a:effectLst/>
-        </p:spPr>
-        <p:style>
-          <a:lnRef idx="1">
-            <a:schemeClr val="accent1"/>
-          </a:lnRef>
-          <a:fillRef idx="3">
-            <a:schemeClr val="accent1"/>
-          </a:fillRef>
-          <a:effectRef idx="2">
-            <a:schemeClr val="accent1"/>
-          </a:effectRef>
-          <a:fontRef idx="minor">
-            <a:schemeClr val="lt1"/>
-          </a:fontRef>
-        </p:style>
-        <p:txBody>
-          <a:bodyPr rtlCol="0" anchor="ctr" wrap="square"/>
-          <a:lstStyle/>
-          <a:p>
-            <a:pPr algn="ctr"/>
-          </a:p>
-        </p:txBody>
-      </p:sp>
-      <p:sp>
-        <p:nvSpPr>
-          <p:cNvPr id="26" name="TextBox 25"/>
-          <p:cNvSpPr txBox="1"/>
-          <p:nvPr/>
-        </p:nvSpPr>
-        <p:spPr>
-          <a:xfrm>
-            <a:off x="731520" y="2980944"/>
-            <a:ext cx="2743200" cy="237744"/>
-          </a:xfrm>
-          <a:prstGeom prst="rect">
-            <a:avLst/>
-          </a:prstGeom>
-          <a:noFill/>
-        </p:spPr>
-        <p:txBody>
-          <a:bodyPr wrap="square" anchor="t" lIns="0" rIns="0" tIns="0" bIns="0">
-            <a:noAutofit/>
-          </a:bodyPr>
-          <a:lstStyle/>
-          <a:p>
-            <a:pPr algn="l">
-              <a:lnSpc>
-                <a:spcPct val="128000"/>
-              </a:lnSpc>
-              <a:spcBef>
-                <a:spcPts val="0"/>
-              </a:spcBef>
-              <a:spcAft>
-                <a:spcPts val="0"/>
-              </a:spcAft>
-            </a:pPr>
-            <a:r>
-              <a:rPr sz="1000" b="1" i="0">
-                <a:solidFill>
-                  <a:srgbClr val="FFFFFF"/>
-                </a:solidFill>
-                <a:latin typeface="微软雅黑"/>
-                <a:ea typeface="微软雅黑"/>
-                <a:cs typeface="微软雅黑"/>
-              </a:rPr>
-              <a:t>外部能力</a:t>
-            </a:r>
-          </a:p>
-        </p:txBody>
-      </p:sp>
-      <p:sp>
-        <p:nvSpPr>
-          <p:cNvPr id="27" name="TextBox 26"/>
-          <p:cNvSpPr txBox="1"/>
-          <p:nvPr/>
-        </p:nvSpPr>
-        <p:spPr>
-          <a:xfrm>
-            <a:off x="3749039" y="2980944"/>
-            <a:ext cx="4023360" cy="237744"/>
-          </a:xfrm>
-          <a:prstGeom prst="rect">
-            <a:avLst/>
-          </a:prstGeom>
-          <a:noFill/>
-        </p:spPr>
-        <p:txBody>
-          <a:bodyPr wrap="square" anchor="t" lIns="0" rIns="0" tIns="0" bIns="0">
-            <a:noAutofit/>
-          </a:bodyPr>
-          <a:lstStyle/>
-          <a:p>
-            <a:pPr algn="l">
-              <a:lnSpc>
-                <a:spcPct val="128000"/>
-              </a:lnSpc>
-              <a:spcBef>
-                <a:spcPts val="0"/>
-              </a:spcBef>
-              <a:spcAft>
-                <a:spcPts val="0"/>
-              </a:spcAft>
-            </a:pPr>
-            <a:r>
-              <a:rPr sz="1000" b="1" i="0">
-                <a:solidFill>
-                  <a:srgbClr val="FFFFFF"/>
-                </a:solidFill>
-                <a:latin typeface="微软雅黑"/>
-                <a:ea typeface="微软雅黑"/>
-                <a:cs typeface="微软雅黑"/>
-              </a:rPr>
-              <a:t>缺失 / 异常时的行为</a:t>
-            </a:r>
-          </a:p>
-        </p:txBody>
-      </p:sp>
-      <p:sp>
-        <p:nvSpPr>
-          <p:cNvPr id="28" name="TextBox 27"/>
-          <p:cNvSpPr txBox="1"/>
-          <p:nvPr/>
-        </p:nvSpPr>
-        <p:spPr>
-          <a:xfrm>
-            <a:off x="8046720" y="2980944"/>
-            <a:ext cx="3438144" cy="237744"/>
-          </a:xfrm>
-          <a:prstGeom prst="rect">
-            <a:avLst/>
-          </a:prstGeom>
-          <a:noFill/>
-        </p:spPr>
-        <p:txBody>
-          <a:bodyPr wrap="square" anchor="t" lIns="0" rIns="0" tIns="0" bIns="0">
-            <a:noAutofit/>
-          </a:bodyPr>
-          <a:lstStyle/>
-          <a:p>
-            <a:pPr algn="l">
-              <a:lnSpc>
-                <a:spcPct val="128000"/>
-              </a:lnSpc>
-              <a:spcBef>
-                <a:spcPts val="0"/>
-              </a:spcBef>
-              <a:spcAft>
-                <a:spcPts val="0"/>
-              </a:spcAft>
-            </a:pPr>
-            <a:r>
-              <a:rPr sz="1000" b="1" i="0">
-                <a:solidFill>
-                  <a:srgbClr val="FFFFFF"/>
-                </a:solidFill>
-                <a:latin typeface="微软雅黑"/>
-                <a:ea typeface="微软雅黑"/>
-                <a:cs typeface="微软雅黑"/>
-              </a:rPr>
-              <a:t>对用户的影响</a:t>
-            </a:r>
-          </a:p>
-        </p:txBody>
-      </p:sp>
-      <p:sp>
-        <p:nvSpPr>
-          <p:cNvPr id="29" name="Rounded Rectangle 28"/>
-          <p:cNvSpPr/>
-          <p:nvPr/>
-        </p:nvSpPr>
-        <p:spPr>
-          <a:xfrm>
-            <a:off x="566928" y="3328416"/>
-            <a:ext cx="11027663" cy="475488"/>
-          </a:xfrm>
-          <a:prstGeom prst="roundRect">
-            <a:avLst>
-              <a:gd name="adj" fmla="val 2799"/>
-            </a:avLst>
-          </a:prstGeom>
-          <a:solidFill>
-            <a:srgbClr val="FFFFFF"/>
-          </a:solidFill>
-          <a:ln w="9525">
-            <a:solidFill>
-              <a:srgbClr val="EBE0D6"/>
-            </a:solidFill>
-          </a:ln>
-          <a:effectLst/>
-        </p:spPr>
-        <p:style>
-          <a:lnRef idx="1">
-            <a:schemeClr val="accent1"/>
-          </a:lnRef>
-          <a:fillRef idx="3">
-            <a:schemeClr val="accent1"/>
-          </a:fillRef>
-          <a:effectRef idx="2">
-            <a:schemeClr val="accent1"/>
-          </a:effectRef>
-          <a:fontRef idx="minor">
-            <a:schemeClr val="lt1"/>
-          </a:fontRef>
-        </p:style>
-        <p:txBody>
-          <a:bodyPr rtlCol="0" anchor="ctr" wrap="square"/>
-          <a:lstStyle/>
-          <a:p>
-            <a:pPr algn="ctr"/>
-          </a:p>
-        </p:txBody>
-      </p:sp>
-      <p:sp>
-        <p:nvSpPr>
-          <p:cNvPr id="30" name="TextBox 29"/>
-          <p:cNvSpPr txBox="1"/>
-          <p:nvPr/>
-        </p:nvSpPr>
-        <p:spPr>
-          <a:xfrm>
-            <a:off x="731520" y="3401568"/>
-            <a:ext cx="2743200" cy="347472"/>
-          </a:xfrm>
-          <a:prstGeom prst="rect">
-            <a:avLst/>
-          </a:prstGeom>
-          <a:noFill/>
-        </p:spPr>
-        <p:txBody>
-          <a:bodyPr wrap="square" anchor="t" lIns="0" rIns="0" tIns="0" bIns="0">
-            <a:noAutofit/>
-          </a:bodyPr>
-          <a:lstStyle/>
-          <a:p>
-            <a:pPr algn="l">
-              <a:lnSpc>
-                <a:spcPct val="118000"/>
-              </a:lnSpc>
-              <a:spcBef>
-                <a:spcPts val="0"/>
-              </a:spcBef>
-              <a:spcAft>
-                <a:spcPts val="0"/>
-              </a:spcAft>
-            </a:pPr>
-            <a:r>
-              <a:rPr sz="930" b="1" i="0">
-                <a:solidFill>
-                  <a:srgbClr val="1B2030"/>
-                </a:solidFill>
-                <a:latin typeface="微软雅黑"/>
-                <a:ea typeface="微软雅黑"/>
-                <a:cs typeface="微软雅黑"/>
-              </a:rPr>
-              <a:t>高德 Key 缺失或配额耗尽</a:t>
-            </a:r>
-          </a:p>
-        </p:txBody>
-      </p:sp>
-      <p:sp>
-        <p:nvSpPr>
-          <p:cNvPr id="31" name="TextBox 30"/>
-          <p:cNvSpPr txBox="1"/>
-          <p:nvPr/>
-        </p:nvSpPr>
-        <p:spPr>
-          <a:xfrm>
-            <a:off x="3749039" y="3401568"/>
-            <a:ext cx="4023360" cy="347472"/>
-          </a:xfrm>
-          <a:prstGeom prst="rect">
-            <a:avLst/>
-          </a:prstGeom>
-          <a:noFill/>
-        </p:spPr>
-        <p:txBody>
-          <a:bodyPr wrap="square" anchor="t" lIns="0" rIns="0" tIns="0" bIns="0">
-            <a:noAutofit/>
-          </a:bodyPr>
-          <a:lstStyle/>
-          <a:p>
-            <a:pPr algn="l">
-              <a:lnSpc>
-                <a:spcPct val="118000"/>
-              </a:lnSpc>
-              <a:spcBef>
-                <a:spcPts val="0"/>
-              </a:spcBef>
-              <a:spcAft>
-                <a:spcPts val="0"/>
-              </a:spcAft>
-            </a:pPr>
-            <a:r>
-              <a:rPr sz="930" b="0" i="0">
-                <a:solidFill>
-                  <a:srgbClr val="333A4D"/>
-                </a:solidFill>
-                <a:latin typeface="微软雅黑"/>
-                <a:ea typeface="微软雅黑"/>
-                <a:cs typeface="微软雅黑"/>
-              </a:rPr>
-              <a:t>返回内置离线 POI 样例，标记 degraded=true</a:t>
-            </a:r>
-          </a:p>
-        </p:txBody>
-      </p:sp>
-      <p:sp>
-        <p:nvSpPr>
-          <p:cNvPr id="32" name="TextBox 31"/>
-          <p:cNvSpPr txBox="1"/>
-          <p:nvPr/>
-        </p:nvSpPr>
-        <p:spPr>
-          <a:xfrm>
-            <a:off x="8046720" y="3401568"/>
-            <a:ext cx="3438144" cy="347472"/>
-          </a:xfrm>
-          <a:prstGeom prst="rect">
-            <a:avLst/>
-          </a:prstGeom>
-          <a:noFill/>
-        </p:spPr>
-        <p:txBody>
-          <a:bodyPr wrap="square" anchor="t" lIns="0" rIns="0" tIns="0" bIns="0">
-            <a:noAutofit/>
-          </a:bodyPr>
-          <a:lstStyle/>
-          <a:p>
-            <a:pPr algn="l">
-              <a:lnSpc>
-                <a:spcPct val="118000"/>
-              </a:lnSpc>
-              <a:spcBef>
-                <a:spcPts val="0"/>
-              </a:spcBef>
-              <a:spcAft>
-                <a:spcPts val="0"/>
-              </a:spcAft>
-            </a:pPr>
-            <a:r>
-              <a:rPr sz="930" b="0" i="0">
-                <a:solidFill>
-                  <a:srgbClr val="333A4D"/>
-                </a:solidFill>
-                <a:latin typeface="微软雅黑"/>
-                <a:ea typeface="微软雅黑"/>
-                <a:cs typeface="微软雅黑"/>
-              </a:rPr>
-              <a:t>附近页照常可用，标注数据来源</a:t>
-            </a:r>
-          </a:p>
-        </p:txBody>
-      </p:sp>
-      <p:sp>
-        <p:nvSpPr>
-          <p:cNvPr id="33" name="Rounded Rectangle 32"/>
-          <p:cNvSpPr/>
-          <p:nvPr/>
-        </p:nvSpPr>
-        <p:spPr>
-          <a:xfrm>
-            <a:off x="566928" y="3854196"/>
-            <a:ext cx="11027663" cy="475488"/>
-          </a:xfrm>
-          <a:prstGeom prst="roundRect">
-            <a:avLst>
-              <a:gd name="adj" fmla="val 2799"/>
-            </a:avLst>
-          </a:prstGeom>
-          <a:solidFill>
-            <a:srgbClr val="FBF7F3"/>
-          </a:solidFill>
-          <a:ln w="9525">
-            <a:solidFill>
-              <a:srgbClr val="EBE0D6"/>
-            </a:solidFill>
-          </a:ln>
-          <a:effectLst/>
-        </p:spPr>
-        <p:style>
-          <a:lnRef idx="1">
-            <a:schemeClr val="accent1"/>
-          </a:lnRef>
-          <a:fillRef idx="3">
-            <a:schemeClr val="accent1"/>
-          </a:fillRef>
-          <a:effectRef idx="2">
-            <a:schemeClr val="accent1"/>
-          </a:effectRef>
-          <a:fontRef idx="minor">
-            <a:schemeClr val="lt1"/>
-          </a:fontRef>
-        </p:style>
-        <p:txBody>
-          <a:bodyPr rtlCol="0" anchor="ctr" wrap="square"/>
-          <a:lstStyle/>
-          <a:p>
-            <a:pPr algn="ctr"/>
-          </a:p>
-        </p:txBody>
-      </p:sp>
-      <p:sp>
-        <p:nvSpPr>
-          <p:cNvPr id="34" name="TextBox 33"/>
-          <p:cNvSpPr txBox="1"/>
-          <p:nvPr/>
-        </p:nvSpPr>
-        <p:spPr>
-          <a:xfrm>
-            <a:off x="731520" y="3927348"/>
-            <a:ext cx="2743200" cy="347472"/>
-          </a:xfrm>
-          <a:prstGeom prst="rect">
-            <a:avLst/>
-          </a:prstGeom>
-          <a:noFill/>
-        </p:spPr>
-        <p:txBody>
-          <a:bodyPr wrap="square" anchor="t" lIns="0" rIns="0" tIns="0" bIns="0">
-            <a:noAutofit/>
-          </a:bodyPr>
-          <a:lstStyle/>
-          <a:p>
-            <a:pPr algn="l">
-              <a:lnSpc>
-                <a:spcPct val="118000"/>
-              </a:lnSpc>
-              <a:spcBef>
-                <a:spcPts val="0"/>
-              </a:spcBef>
-              <a:spcAft>
-                <a:spcPts val="0"/>
-              </a:spcAft>
-            </a:pPr>
-            <a:r>
-              <a:rPr sz="930" b="1" i="0">
-                <a:solidFill>
-                  <a:srgbClr val="1B2030"/>
-                </a:solidFill>
-                <a:latin typeface="微软雅黑"/>
-                <a:ea typeface="微软雅黑"/>
-                <a:cs typeface="微软雅黑"/>
-              </a:rPr>
-              <a:t>LLM 不可用 / 超时</a:t>
-            </a:r>
-          </a:p>
-        </p:txBody>
-      </p:sp>
-      <p:sp>
-        <p:nvSpPr>
-          <p:cNvPr id="35" name="TextBox 34"/>
-          <p:cNvSpPr txBox="1"/>
-          <p:nvPr/>
-        </p:nvSpPr>
-        <p:spPr>
-          <a:xfrm>
-            <a:off x="3749039" y="3927348"/>
-            <a:ext cx="4023360" cy="347472"/>
-          </a:xfrm>
-          <a:prstGeom prst="rect">
-            <a:avLst/>
-          </a:prstGeom>
-          <a:noFill/>
-        </p:spPr>
-        <p:txBody>
-          <a:bodyPr wrap="square" anchor="t" lIns="0" rIns="0" tIns="0" bIns="0">
-            <a:noAutofit/>
-          </a:bodyPr>
-          <a:lstStyle/>
-          <a:p>
-            <a:pPr algn="l">
-              <a:lnSpc>
-                <a:spcPct val="118000"/>
-              </a:lnSpc>
-              <a:spcBef>
-                <a:spcPts val="0"/>
-              </a:spcBef>
-              <a:spcAft>
-                <a:spcPts val="0"/>
-              </a:spcAft>
-            </a:pPr>
-            <a:r>
-              <a:rPr sz="930" b="0" i="0">
-                <a:solidFill>
-                  <a:srgbClr val="333A4D"/>
-                </a:solidFill>
-                <a:latin typeface="微软雅黑"/>
-                <a:ea typeface="微软雅黑"/>
-                <a:cs typeface="微软雅黑"/>
-              </a:rPr>
-              <a:t>助手降级为检索式回答，引用照常返回</a:t>
-            </a:r>
-          </a:p>
-        </p:txBody>
-      </p:sp>
-      <p:sp>
-        <p:nvSpPr>
-          <p:cNvPr id="36" name="TextBox 35"/>
-          <p:cNvSpPr txBox="1"/>
-          <p:nvPr/>
-        </p:nvSpPr>
-        <p:spPr>
-          <a:xfrm>
-            <a:off x="8046720" y="3927348"/>
-            <a:ext cx="3438144" cy="347472"/>
-          </a:xfrm>
-          <a:prstGeom prst="rect">
-            <a:avLst/>
-          </a:prstGeom>
-          <a:noFill/>
-        </p:spPr>
-        <p:txBody>
-          <a:bodyPr wrap="square" anchor="t" lIns="0" rIns="0" tIns="0" bIns="0">
-            <a:noAutofit/>
-          </a:bodyPr>
-          <a:lstStyle/>
-          <a:p>
-            <a:pPr algn="l">
-              <a:lnSpc>
-                <a:spcPct val="118000"/>
-              </a:lnSpc>
-              <a:spcBef>
-                <a:spcPts val="0"/>
-              </a:spcBef>
-              <a:spcAft>
-                <a:spcPts val="0"/>
-              </a:spcAft>
-            </a:pPr>
-            <a:r>
-              <a:rPr sz="930" b="0" i="0">
-                <a:solidFill>
-                  <a:srgbClr val="333A4D"/>
-                </a:solidFill>
-                <a:latin typeface="微软雅黑"/>
-                <a:ea typeface="微软雅黑"/>
-                <a:cs typeface="微软雅黑"/>
-              </a:rPr>
-              <a:t>回答变简洁，结论仍可溯源</a:t>
-            </a:r>
-          </a:p>
-        </p:txBody>
-      </p:sp>
-      <p:sp>
-        <p:nvSpPr>
-          <p:cNvPr id="37" name="Rounded Rectangle 36"/>
-          <p:cNvSpPr/>
-          <p:nvPr/>
-        </p:nvSpPr>
-        <p:spPr>
-          <a:xfrm>
-            <a:off x="566928" y="4379976"/>
-            <a:ext cx="11027663" cy="475488"/>
-          </a:xfrm>
-          <a:prstGeom prst="roundRect">
-            <a:avLst>
-              <a:gd name="adj" fmla="val 2799"/>
-            </a:avLst>
-          </a:prstGeom>
-          <a:solidFill>
-            <a:srgbClr val="FFFFFF"/>
-          </a:solidFill>
-          <a:ln w="9525">
-            <a:solidFill>
-              <a:srgbClr val="EBE0D6"/>
-            </a:solidFill>
-          </a:ln>
-          <a:effectLst/>
-        </p:spPr>
-        <p:style>
-          <a:lnRef idx="1">
-            <a:schemeClr val="accent1"/>
-          </a:lnRef>
-          <a:fillRef idx="3">
-            <a:schemeClr val="accent1"/>
-          </a:fillRef>
-          <a:effectRef idx="2">
-            <a:schemeClr val="accent1"/>
-          </a:effectRef>
-          <a:fontRef idx="minor">
-            <a:schemeClr val="lt1"/>
-          </a:fontRef>
-        </p:style>
-        <p:txBody>
-          <a:bodyPr rtlCol="0" anchor="ctr" wrap="square"/>
-          <a:lstStyle/>
-          <a:p>
-            <a:pPr algn="ctr"/>
-          </a:p>
-        </p:txBody>
-      </p:sp>
-      <p:sp>
-        <p:nvSpPr>
-          <p:cNvPr id="38" name="TextBox 37"/>
-          <p:cNvSpPr txBox="1"/>
-          <p:nvPr/>
-        </p:nvSpPr>
-        <p:spPr>
-          <a:xfrm>
-            <a:off x="731520" y="4453128"/>
-            <a:ext cx="2743200" cy="347472"/>
-          </a:xfrm>
-          <a:prstGeom prst="rect">
-            <a:avLst/>
-          </a:prstGeom>
-          <a:noFill/>
-        </p:spPr>
-        <p:txBody>
-          <a:bodyPr wrap="square" anchor="t" lIns="0" rIns="0" tIns="0" bIns="0">
-            <a:noAutofit/>
-          </a:bodyPr>
-          <a:lstStyle/>
-          <a:p>
-            <a:pPr algn="l">
-              <a:lnSpc>
-                <a:spcPct val="118000"/>
-              </a:lnSpc>
-              <a:spcBef>
-                <a:spcPts val="0"/>
-              </a:spcBef>
-              <a:spcAft>
-                <a:spcPts val="0"/>
-              </a:spcAft>
-            </a:pPr>
-            <a:r>
-              <a:rPr sz="930" b="1" i="0">
-                <a:solidFill>
-                  <a:srgbClr val="1B2030"/>
-                </a:solidFill>
-                <a:latin typeface="微软雅黑"/>
-                <a:ea typeface="微软雅黑"/>
-                <a:cs typeface="微软雅黑"/>
-              </a:rPr>
-              <a:t>RAG 索引未构建</a:t>
-            </a:r>
-          </a:p>
-        </p:txBody>
-      </p:sp>
-      <p:sp>
-        <p:nvSpPr>
-          <p:cNvPr id="39" name="TextBox 38"/>
-          <p:cNvSpPr txBox="1"/>
-          <p:nvPr/>
-        </p:nvSpPr>
-        <p:spPr>
-          <a:xfrm>
-            <a:off x="3749039" y="4453128"/>
-            <a:ext cx="4023360" cy="347472"/>
-          </a:xfrm>
-          <a:prstGeom prst="rect">
-            <a:avLst/>
-          </a:prstGeom>
-          <a:noFill/>
-        </p:spPr>
-        <p:txBody>
-          <a:bodyPr wrap="square" anchor="t" lIns="0" rIns="0" tIns="0" bIns="0">
-            <a:noAutofit/>
-          </a:bodyPr>
-          <a:lstStyle/>
-          <a:p>
-            <a:pPr algn="l">
-              <a:lnSpc>
-                <a:spcPct val="118000"/>
-              </a:lnSpc>
-              <a:spcBef>
-                <a:spcPts val="0"/>
-              </a:spcBef>
-              <a:spcAft>
-                <a:spcPts val="0"/>
-              </a:spcAft>
-            </a:pPr>
-            <a:r>
-              <a:rPr sz="930" b="0" i="0">
-                <a:solidFill>
-                  <a:srgbClr val="333A4D"/>
-                </a:solidFill>
-                <a:latin typeface="微软雅黑"/>
-                <a:ea typeface="微软雅黑"/>
-                <a:cs typeface="微软雅黑"/>
-              </a:rPr>
-              <a:t>语义检索退化为关键词检索，不抛 500</a:t>
-            </a:r>
-          </a:p>
-        </p:txBody>
-      </p:sp>
-      <p:sp>
-        <p:nvSpPr>
-          <p:cNvPr id="40" name="TextBox 39"/>
-          <p:cNvSpPr txBox="1"/>
-          <p:nvPr/>
-        </p:nvSpPr>
-        <p:spPr>
-          <a:xfrm>
-            <a:off x="8046720" y="4453128"/>
-            <a:ext cx="3438144" cy="347472"/>
-          </a:xfrm>
-          <a:prstGeom prst="rect">
-            <a:avLst/>
-          </a:prstGeom>
-          <a:noFill/>
-        </p:spPr>
-        <p:txBody>
-          <a:bodyPr wrap="square" anchor="t" lIns="0" rIns="0" tIns="0" bIns="0">
-            <a:noAutofit/>
-          </a:bodyPr>
-          <a:lstStyle/>
-          <a:p>
-            <a:pPr algn="l">
-              <a:lnSpc>
-                <a:spcPct val="118000"/>
-              </a:lnSpc>
-              <a:spcBef>
-                <a:spcPts val="0"/>
-              </a:spcBef>
-              <a:spcAft>
-                <a:spcPts val="0"/>
-              </a:spcAft>
-            </a:pPr>
-            <a:r>
-              <a:rPr sz="930" b="0" i="0">
-                <a:solidFill>
-                  <a:srgbClr val="333A4D"/>
-                </a:solidFill>
-                <a:latin typeface="微软雅黑"/>
-                <a:ea typeface="微软雅黑"/>
-                <a:cs typeface="微软雅黑"/>
-              </a:rPr>
-              <a:t>搜索仍可用，精度略降</a:t>
-            </a:r>
-          </a:p>
-        </p:txBody>
-      </p:sp>
-      <p:sp>
-        <p:nvSpPr>
-          <p:cNvPr id="41" name="Rounded Rectangle 40"/>
-          <p:cNvSpPr/>
-          <p:nvPr/>
-        </p:nvSpPr>
-        <p:spPr>
-          <a:xfrm>
-            <a:off x="566928" y="4905756"/>
-            <a:ext cx="11027663" cy="475488"/>
-          </a:xfrm>
-          <a:prstGeom prst="roundRect">
-            <a:avLst>
-              <a:gd name="adj" fmla="val 2799"/>
-            </a:avLst>
-          </a:prstGeom>
-          <a:solidFill>
-            <a:srgbClr val="FBF7F3"/>
-          </a:solidFill>
-          <a:ln w="9525">
-            <a:solidFill>
-              <a:srgbClr val="EBE0D6"/>
-            </a:solidFill>
-          </a:ln>
-          <a:effectLst/>
-        </p:spPr>
-        <p:style>
-          <a:lnRef idx="1">
-            <a:schemeClr val="accent1"/>
-          </a:lnRef>
-          <a:fillRef idx="3">
-            <a:schemeClr val="accent1"/>
-          </a:fillRef>
-          <a:effectRef idx="2">
-            <a:schemeClr val="accent1"/>
-          </a:effectRef>
-          <a:fontRef idx="minor">
-            <a:schemeClr val="lt1"/>
-          </a:fontRef>
-        </p:style>
-        <p:txBody>
-          <a:bodyPr rtlCol="0" anchor="ctr" wrap="square"/>
-          <a:lstStyle/>
-          <a:p>
-            <a:pPr algn="ctr"/>
-          </a:p>
-        </p:txBody>
-      </p:sp>
-      <p:sp>
-        <p:nvSpPr>
-          <p:cNvPr id="42" name="TextBox 41"/>
-          <p:cNvSpPr txBox="1"/>
-          <p:nvPr/>
-        </p:nvSpPr>
-        <p:spPr>
-          <a:xfrm>
-            <a:off x="731520" y="4978908"/>
-            <a:ext cx="2743200" cy="347472"/>
-          </a:xfrm>
-          <a:prstGeom prst="rect">
-            <a:avLst/>
-          </a:prstGeom>
-          <a:noFill/>
-        </p:spPr>
-        <p:txBody>
-          <a:bodyPr wrap="square" anchor="t" lIns="0" rIns="0" tIns="0" bIns="0">
-            <a:noAutofit/>
-          </a:bodyPr>
-          <a:lstStyle/>
-          <a:p>
-            <a:pPr algn="l">
-              <a:lnSpc>
-                <a:spcPct val="118000"/>
-              </a:lnSpc>
-              <a:spcBef>
-                <a:spcPts val="0"/>
-              </a:spcBef>
-              <a:spcAft>
-                <a:spcPts val="0"/>
-              </a:spcAft>
-            </a:pPr>
-            <a:r>
-              <a:rPr sz="930" b="1" i="0">
-                <a:solidFill>
-                  <a:srgbClr val="1B2030"/>
-                </a:solidFill>
-                <a:latin typeface="微软雅黑"/>
-                <a:ea typeface="微软雅黑"/>
-                <a:cs typeface="微软雅黑"/>
-              </a:rPr>
-              <a:t>外网断开</a:t>
-            </a:r>
-          </a:p>
-        </p:txBody>
-      </p:sp>
-      <p:sp>
-        <p:nvSpPr>
-          <p:cNvPr id="43" name="TextBox 42"/>
-          <p:cNvSpPr txBox="1"/>
-          <p:nvPr/>
-        </p:nvSpPr>
-        <p:spPr>
-          <a:xfrm>
-            <a:off x="3749039" y="4978908"/>
-            <a:ext cx="4023360" cy="347472"/>
-          </a:xfrm>
-          <a:prstGeom prst="rect">
-            <a:avLst/>
-          </a:prstGeom>
-          <a:noFill/>
-        </p:spPr>
-        <p:txBody>
-          <a:bodyPr wrap="square" anchor="t" lIns="0" rIns="0" tIns="0" bIns="0">
-            <a:noAutofit/>
-          </a:bodyPr>
-          <a:lstStyle/>
-          <a:p>
-            <a:pPr algn="l">
-              <a:lnSpc>
-                <a:spcPct val="118000"/>
-              </a:lnSpc>
-              <a:spcBef>
-                <a:spcPts val="0"/>
-              </a:spcBef>
-              <a:spcAft>
-                <a:spcPts val="0"/>
-              </a:spcAft>
-            </a:pPr>
-            <a:r>
-              <a:rPr sz="930" b="0" i="0">
-                <a:solidFill>
-                  <a:srgbClr val="333A4D"/>
-                </a:solidFill>
-                <a:latin typeface="微软雅黑"/>
-                <a:ea typeface="微软雅黑"/>
-                <a:cs typeface="微软雅黑"/>
-              </a:rPr>
-              <a:t>websearch 读取本地 fixtures 并标记</a:t>
-            </a:r>
-          </a:p>
-        </p:txBody>
-      </p:sp>
-      <p:sp>
-        <p:nvSpPr>
-          <p:cNvPr id="44" name="TextBox 43"/>
-          <p:cNvSpPr txBox="1"/>
-          <p:nvPr/>
-        </p:nvSpPr>
-        <p:spPr>
-          <a:xfrm>
-            <a:off x="8046720" y="4978908"/>
-            <a:ext cx="3438144" cy="347472"/>
-          </a:xfrm>
-          <a:prstGeom prst="rect">
-            <a:avLst/>
-          </a:prstGeom>
-          <a:noFill/>
-        </p:spPr>
-        <p:txBody>
-          <a:bodyPr wrap="square" anchor="t" lIns="0" rIns="0" tIns="0" bIns="0">
-            <a:noAutofit/>
-          </a:bodyPr>
-          <a:lstStyle/>
-          <a:p>
-            <a:pPr algn="l">
-              <a:lnSpc>
-                <a:spcPct val="118000"/>
-              </a:lnSpc>
-              <a:spcBef>
-                <a:spcPts val="0"/>
-              </a:spcBef>
-              <a:spcAft>
-                <a:spcPts val="0"/>
-              </a:spcAft>
-            </a:pPr>
-            <a:r>
-              <a:rPr sz="930" b="0" i="0">
-                <a:solidFill>
-                  <a:srgbClr val="333A4D"/>
-                </a:solidFill>
-                <a:latin typeface="微软雅黑"/>
-                <a:ea typeface="微软雅黑"/>
-                <a:cs typeface="微软雅黑"/>
-              </a:rPr>
-              <a:t>演示链路不断</a:t>
-            </a:r>
-          </a:p>
-        </p:txBody>
-      </p:sp>
-      <p:sp>
-        <p:nvSpPr>
-          <p:cNvPr id="45" name="Rounded Rectangle 44"/>
-          <p:cNvSpPr/>
-          <p:nvPr/>
-        </p:nvSpPr>
-        <p:spPr>
-          <a:xfrm>
-            <a:off x="566928" y="5431536"/>
-            <a:ext cx="11027663" cy="475488"/>
-          </a:xfrm>
-          <a:prstGeom prst="roundRect">
-            <a:avLst>
-              <a:gd name="adj" fmla="val 2799"/>
-            </a:avLst>
-          </a:prstGeom>
-          <a:solidFill>
-            <a:srgbClr val="FFFFFF"/>
-          </a:solidFill>
-          <a:ln w="9525">
-            <a:solidFill>
-              <a:srgbClr val="EBE0D6"/>
-            </a:solidFill>
-          </a:ln>
-          <a:effectLst/>
-        </p:spPr>
-        <p:style>
-          <a:lnRef idx="1">
-            <a:schemeClr val="accent1"/>
-          </a:lnRef>
-          <a:fillRef idx="3">
-            <a:schemeClr val="accent1"/>
-          </a:fillRef>
-          <a:effectRef idx="2">
-            <a:schemeClr val="accent1"/>
-          </a:effectRef>
-          <a:fontRef idx="minor">
-            <a:schemeClr val="lt1"/>
-          </a:fontRef>
-        </p:style>
-        <p:txBody>
-          <a:bodyPr rtlCol="0" anchor="ctr" wrap="square"/>
-          <a:lstStyle/>
-          <a:p>
-            <a:pPr algn="ctr"/>
-          </a:p>
-        </p:txBody>
-      </p:sp>
-      <p:sp>
-        <p:nvSpPr>
-          <p:cNvPr id="46" name="TextBox 45"/>
-          <p:cNvSpPr txBox="1"/>
-          <p:nvPr/>
-        </p:nvSpPr>
-        <p:spPr>
-          <a:xfrm>
-            <a:off x="731520" y="5504688"/>
-            <a:ext cx="2743200" cy="347472"/>
-          </a:xfrm>
-          <a:prstGeom prst="rect">
-            <a:avLst/>
-          </a:prstGeom>
-          <a:noFill/>
-        </p:spPr>
-        <p:txBody>
-          <a:bodyPr wrap="square" anchor="t" lIns="0" rIns="0" tIns="0" bIns="0">
-            <a:noAutofit/>
-          </a:bodyPr>
-          <a:lstStyle/>
-          <a:p>
-            <a:pPr algn="l">
-              <a:lnSpc>
-                <a:spcPct val="118000"/>
-              </a:lnSpc>
-              <a:spcBef>
-                <a:spcPts val="0"/>
-              </a:spcBef>
-              <a:spcAft>
-                <a:spcPts val="0"/>
-              </a:spcAft>
-            </a:pPr>
-            <a:r>
-              <a:rPr sz="930" b="1" i="0">
-                <a:solidFill>
-                  <a:srgbClr val="1B2030"/>
-                </a:solidFill>
-                <a:latin typeface="微软雅黑"/>
-                <a:ea typeface="微软雅黑"/>
-                <a:cs typeface="微软雅黑"/>
-              </a:rPr>
-              <a:t>数据库方言差异</a:t>
-            </a:r>
-          </a:p>
-        </p:txBody>
-      </p:sp>
-      <p:sp>
-        <p:nvSpPr>
-          <p:cNvPr id="47" name="TextBox 46"/>
-          <p:cNvSpPr txBox="1"/>
-          <p:nvPr/>
-        </p:nvSpPr>
-        <p:spPr>
-          <a:xfrm>
-            <a:off x="3749039" y="5504688"/>
-            <a:ext cx="4023360" cy="347472"/>
-          </a:xfrm>
-          <a:prstGeom prst="rect">
-            <a:avLst/>
-          </a:prstGeom>
-          <a:noFill/>
-        </p:spPr>
-        <p:txBody>
-          <a:bodyPr wrap="square" anchor="t" lIns="0" rIns="0" tIns="0" bIns="0">
-            <a:noAutofit/>
-          </a:bodyPr>
-          <a:lstStyle/>
-          <a:p>
-            <a:pPr algn="l">
-              <a:lnSpc>
-                <a:spcPct val="118000"/>
-              </a:lnSpc>
-              <a:spcBef>
-                <a:spcPts val="0"/>
-              </a:spcBef>
-              <a:spcAft>
-                <a:spcPts val="0"/>
-              </a:spcAft>
-            </a:pPr>
-            <a:r>
-              <a:rPr sz="930" b="0" i="0">
-                <a:solidFill>
-                  <a:srgbClr val="333A4D"/>
-                </a:solidFill>
-                <a:latin typeface="微软雅黑"/>
-                <a:ea typeface="微软雅黑"/>
-                <a:cs typeface="微软雅黑"/>
-              </a:rPr>
               <a:t>PG 守卫测试：禁裸 SQL、禁硬编码 DSN</a:t>
             </a:r>
           </a:p>
@@ -6326,8 +6322,8 @@
         </p:nvSpPr>
         <p:spPr>
           <a:xfrm>
-            <a:off x="8046720" y="5504688"/>
-            <a:ext cx="3438144" cy="347472"/>
+            <a:off x="8046720" y="5376672"/>
+            <a:ext cx="3438144" cy="320040"/>
           </a:xfrm>
           <a:prstGeom prst="rect">
             <a:avLst/>
@@ -6373,8 +6369,8 @@
         </p:nvSpPr>
         <p:spPr>
           <a:xfrm>
-            <a:off x="566928" y="5870448"/>
-            <a:ext cx="11027664" cy="384048"/>
+            <a:off x="566928" y="5943600"/>
+            <a:ext cx="11027664" cy="347472"/>
           </a:xfrm>
           <a:prstGeom prst="roundRect">
             <a:avLst>
@@ -6419,8 +6415,8 @@
         </p:nvSpPr>
         <p:spPr>
           <a:xfrm>
-            <a:off x="786384" y="5943600"/>
-            <a:ext cx="10607040" cy="274320"/>
+            <a:off x="786384" y="5998464"/>
+            <a:ext cx="10607040" cy="256032"/>
           </a:xfrm>
           <a:prstGeom prst="rect">
             <a:avLst/>
@@ -6536,23 +6532,23 @@
         </p:nvSpPr>
         <p:spPr>
           <a:xfrm>
-            <a:off x="777240" y="457200"/>
-            <a:ext cx="8595360" cy="457200"/>
-          </a:xfrm>
-          <a:prstGeom prst="rect">
-            <a:avLst/>
-          </a:prstGeom>
-          <a:noFill/>
-        </p:spPr>
-        <p:txBody>
-          <a:bodyPr wrap="square" anchor="t" lIns="0" rIns="0" tIns="0" bIns="0">
-            <a:noAutofit/>
-          </a:bodyPr>
-          <a:lstStyle/>
-          <a:p>
-            <a:pPr algn="l">
-              <a:lnSpc>
-                <a:spcPct val="128000"/>
+            <a:off x="777240" y="438912"/>
+            <a:ext cx="8595360" cy="603504"/>
+          </a:xfrm>
+          <a:prstGeom prst="rect">
+            <a:avLst/>
+          </a:prstGeom>
+          <a:noFill/>
+        </p:spPr>
+        <p:txBody>
+          <a:bodyPr wrap="square" anchor="t" lIns="0" rIns="0" tIns="0" bIns="0">
+            <a:noAutofit/>
+          </a:bodyPr>
+          <a:lstStyle/>
+          <a:p>
+            <a:pPr algn="l">
+              <a:lnSpc>
+                <a:spcPct val="105000"/>
               </a:lnSpc>
               <a:spcBef>
                 <a:spcPts val="0"/>
@@ -6831,7 +6827,6 @@
               <a:srgbClr val="EBE0D6"/>
             </a:solidFill>
           </a:ln>
-          <a:effectLst/>
           <a:effectLst>
             <a:outerShdw blurRad="114300" dist="50800" dir="5400000" rotWithShape="0">
               <a:srgbClr val="40210A">
@@ -7079,7 +7074,6 @@
               <a:srgbClr val="EBE0D6"/>
             </a:solidFill>
           </a:ln>
-          <a:effectLst/>
           <a:effectLst>
             <a:outerShdw blurRad="114300" dist="50800" dir="5400000" rotWithShape="0">
               <a:srgbClr val="40210A">
@@ -7327,7 +7321,6 @@
               <a:srgbClr val="EBE0D6"/>
             </a:solidFill>
           </a:ln>
-          <a:effectLst/>
           <a:effectLst>
             <a:outerShdw blurRad="114300" dist="50800" dir="5400000" rotWithShape="0">
               <a:srgbClr val="40210A">
@@ -7575,7 +7568,6 @@
               <a:srgbClr val="EBE0D6"/>
             </a:solidFill>
           </a:ln>
-          <a:effectLst/>
           <a:effectLst>
             <a:outerShdw blurRad="114300" dist="50800" dir="5400000" rotWithShape="0">
               <a:srgbClr val="40210A">
@@ -7823,7 +7815,6 @@
               <a:srgbClr val="EBE0D6"/>
             </a:solidFill>
           </a:ln>
-          <a:effectLst/>
           <a:effectLst>
             <a:outerShdw blurRad="114300" dist="50800" dir="5400000" rotWithShape="0">
               <a:srgbClr val="40210A">
@@ -8071,7 +8062,6 @@
               <a:srgbClr val="EBE0D6"/>
             </a:solidFill>
           </a:ln>
-          <a:effectLst/>
           <a:effectLst>
             <a:outerShdw blurRad="114300" dist="50800" dir="5400000" rotWithShape="0">
               <a:srgbClr val="40210A">
@@ -8319,7 +8309,6 @@
               <a:srgbClr val="EBE0D6"/>
             </a:solidFill>
           </a:ln>
-          <a:effectLst/>
           <a:effectLst>
             <a:outerShdw blurRad="114300" dist="50800" dir="5400000" rotWithShape="0">
               <a:srgbClr val="40210A">
@@ -8567,7 +8556,6 @@
               <a:srgbClr val="EBE0D6"/>
             </a:solidFill>
           </a:ln>
-          <a:effectLst/>
           <a:effectLst>
             <a:outerShdw blurRad="114300" dist="50800" dir="5400000" rotWithShape="0">
               <a:srgbClr val="40210A">
@@ -9009,23 +8997,23 @@
         </p:nvSpPr>
         <p:spPr>
           <a:xfrm>
-            <a:off x="777240" y="457200"/>
-            <a:ext cx="8595360" cy="457200"/>
-          </a:xfrm>
-          <a:prstGeom prst="rect">
-            <a:avLst/>
-          </a:prstGeom>
-          <a:noFill/>
-        </p:spPr>
-        <p:txBody>
-          <a:bodyPr wrap="square" anchor="t" lIns="0" rIns="0" tIns="0" bIns="0">
-            <a:noAutofit/>
-          </a:bodyPr>
-          <a:lstStyle/>
-          <a:p>
-            <a:pPr algn="l">
-              <a:lnSpc>
-                <a:spcPct val="128000"/>
+            <a:off x="777240" y="438912"/>
+            <a:ext cx="8595360" cy="603504"/>
+          </a:xfrm>
+          <a:prstGeom prst="rect">
+            <a:avLst/>
+          </a:prstGeom>
+          <a:noFill/>
+        </p:spPr>
+        <p:txBody>
+          <a:bodyPr wrap="square" anchor="t" lIns="0" rIns="0" tIns="0" bIns="0">
+            <a:noAutofit/>
+          </a:bodyPr>
+          <a:lstStyle/>
+          <a:p>
+            <a:pPr algn="l">
+              <a:lnSpc>
+                <a:spcPct val="105000"/>
               </a:lnSpc>
               <a:spcBef>
                 <a:spcPts val="0"/>
@@ -9289,7 +9277,7 @@
         <p:spPr>
           <a:xfrm>
             <a:off x="566928" y="1426464"/>
-            <a:ext cx="3602736" cy="3200400"/>
+            <a:ext cx="3602736" cy="3072384"/>
           </a:xfrm>
           <a:prstGeom prst="roundRect">
             <a:avLst>
@@ -9304,7 +9292,6 @@
               <a:srgbClr val="EBE0D6"/>
             </a:solidFill>
           </a:ln>
-          <a:effectLst/>
           <a:effectLst>
             <a:outerShdw blurRad="114300" dist="50800" dir="5400000" rotWithShape="0">
               <a:srgbClr val="40210A">
@@ -9367,8 +9354,8 @@
         </p:nvSpPr>
         <p:spPr>
           <a:xfrm>
-            <a:off x="731520" y="4700016"/>
-            <a:ext cx="3291840" cy="310896"/>
+            <a:off x="731520" y="4553712"/>
+            <a:ext cx="3291840" cy="292608"/>
           </a:xfrm>
           <a:prstGeom prst="rect">
             <a:avLst/>
@@ -9414,23 +9401,23 @@
         </p:nvSpPr>
         <p:spPr>
           <a:xfrm>
-            <a:off x="731520" y="4992624"/>
-            <a:ext cx="3291840" cy="548640"/>
-          </a:xfrm>
-          <a:prstGeom prst="rect">
-            <a:avLst/>
-          </a:prstGeom>
-          <a:noFill/>
-        </p:spPr>
-        <p:txBody>
-          <a:bodyPr wrap="square" anchor="t" lIns="0" rIns="0" tIns="0" bIns="0">
-            <a:noAutofit/>
-          </a:bodyPr>
-          <a:lstStyle/>
-          <a:p>
-            <a:pPr algn="l">
-              <a:lnSpc>
-                <a:spcPct val="128000"/>
+            <a:off x="731520" y="4846320"/>
+            <a:ext cx="3346704" cy="457200"/>
+          </a:xfrm>
+          <a:prstGeom prst="rect">
+            <a:avLst/>
+          </a:prstGeom>
+          <a:noFill/>
+        </p:spPr>
+        <p:txBody>
+          <a:bodyPr wrap="square" anchor="t" lIns="0" rIns="0" tIns="0" bIns="0">
+            <a:noAutofit/>
+          </a:bodyPr>
+          <a:lstStyle/>
+          <a:p>
+            <a:pPr algn="l">
+              <a:lnSpc>
+                <a:spcPct val="126000"/>
               </a:lnSpc>
               <a:spcBef>
                 <a:spcPts val="0"/>
@@ -9462,7 +9449,7 @@
         <p:spPr>
           <a:xfrm>
             <a:off x="4352544" y="1426464"/>
-            <a:ext cx="3602736" cy="3200400"/>
+            <a:ext cx="3602736" cy="3072384"/>
           </a:xfrm>
           <a:prstGeom prst="roundRect">
             <a:avLst>
@@ -9477,7 +9464,6 @@
               <a:srgbClr val="EBE0D6"/>
             </a:solidFill>
           </a:ln>
-          <a:effectLst/>
           <a:effectLst>
             <a:outerShdw blurRad="114300" dist="50800" dir="5400000" rotWithShape="0">
               <a:srgbClr val="40210A">
@@ -9540,8 +9526,8 @@
         </p:nvSpPr>
         <p:spPr>
           <a:xfrm>
-            <a:off x="4517136" y="4700016"/>
-            <a:ext cx="3291840" cy="310896"/>
+            <a:off x="4517136" y="4553712"/>
+            <a:ext cx="3291840" cy="292608"/>
           </a:xfrm>
           <a:prstGeom prst="rect">
             <a:avLst/>
@@ -9587,23 +9573,23 @@
         </p:nvSpPr>
         <p:spPr>
           <a:xfrm>
-            <a:off x="4517136" y="4992624"/>
-            <a:ext cx="3291840" cy="548640"/>
-          </a:xfrm>
-          <a:prstGeom prst="rect">
-            <a:avLst/>
-          </a:prstGeom>
-          <a:noFill/>
-        </p:spPr>
-        <p:txBody>
-          <a:bodyPr wrap="square" anchor="t" lIns="0" rIns="0" tIns="0" bIns="0">
-            <a:noAutofit/>
-          </a:bodyPr>
-          <a:lstStyle/>
-          <a:p>
-            <a:pPr algn="l">
-              <a:lnSpc>
-                <a:spcPct val="128000"/>
+            <a:off x="4517136" y="4846320"/>
+            <a:ext cx="3346704" cy="457200"/>
+          </a:xfrm>
+          <a:prstGeom prst="rect">
+            <a:avLst/>
+          </a:prstGeom>
+          <a:noFill/>
+        </p:spPr>
+        <p:txBody>
+          <a:bodyPr wrap="square" anchor="t" lIns="0" rIns="0" tIns="0" bIns="0">
+            <a:noAutofit/>
+          </a:bodyPr>
+          <a:lstStyle/>
+          <a:p>
+            <a:pPr algn="l">
+              <a:lnSpc>
+                <a:spcPct val="126000"/>
               </a:lnSpc>
               <a:spcBef>
                 <a:spcPts val="0"/>
@@ -9621,7 +9607,7 @@
                 <a:ea typeface="微软雅黑"/>
                 <a:cs typeface="微软雅黑"/>
               </a:rPr>
-              <a:t>自然语言搜索框 + 场景快捷标签 + 大家都在吃 + 按菜系逛 + 本周热门。</a:t>
+              <a:t>自然语言搜索 + 场景标签 + 大家都在吃 + 按菜系逛 + 本周热门。</a:t>
             </a:r>
           </a:p>
         </p:txBody>
@@ -9635,7 +9621,7 @@
         <p:spPr>
           <a:xfrm>
             <a:off x="8138159" y="1426464"/>
-            <a:ext cx="3602736" cy="3200400"/>
+            <a:ext cx="3602736" cy="3072384"/>
           </a:xfrm>
           <a:prstGeom prst="roundRect">
             <a:avLst>
@@ -9650,7 +9636,6 @@
               <a:srgbClr val="EBE0D6"/>
             </a:solidFill>
           </a:ln>
-          <a:effectLst/>
           <a:effectLst>
             <a:outerShdw blurRad="114300" dist="50800" dir="5400000" rotWithShape="0">
               <a:srgbClr val="40210A">
@@ -9713,8 +9698,8 @@
         </p:nvSpPr>
         <p:spPr>
           <a:xfrm>
-            <a:off x="8302751" y="4700016"/>
-            <a:ext cx="3291840" cy="310896"/>
+            <a:off x="8302751" y="4553712"/>
+            <a:ext cx="3291840" cy="292608"/>
           </a:xfrm>
           <a:prstGeom prst="rect">
             <a:avLst/>
@@ -9760,23 +9745,23 @@
         </p:nvSpPr>
         <p:spPr>
           <a:xfrm>
-            <a:off x="8302751" y="4992624"/>
-            <a:ext cx="3291840" cy="548640"/>
-          </a:xfrm>
-          <a:prstGeom prst="rect">
-            <a:avLst/>
-          </a:prstGeom>
-          <a:noFill/>
-        </p:spPr>
-        <p:txBody>
-          <a:bodyPr wrap="square" anchor="t" lIns="0" rIns="0" tIns="0" bIns="0">
-            <a:noAutofit/>
-          </a:bodyPr>
-          <a:lstStyle/>
-          <a:p>
-            <a:pPr algn="l">
-              <a:lnSpc>
-                <a:spcPct val="128000"/>
+            <a:off x="8302751" y="4846320"/>
+            <a:ext cx="3346704" cy="457200"/>
+          </a:xfrm>
+          <a:prstGeom prst="rect">
+            <a:avLst/>
+          </a:prstGeom>
+          <a:noFill/>
+        </p:spPr>
+        <p:txBody>
+          <a:bodyPr wrap="square" anchor="t" lIns="0" rIns="0" tIns="0" bIns="0">
+            <a:noAutofit/>
+          </a:bodyPr>
+          <a:lstStyle/>
+          <a:p>
+            <a:pPr algn="l">
+              <a:lnSpc>
+                <a:spcPct val="126000"/>
               </a:lnSpc>
               <a:spcBef>
                 <a:spcPts val="0"/>
@@ -9807,8 +9792,8 @@
         </p:nvSpPr>
         <p:spPr>
           <a:xfrm>
-            <a:off x="566928" y="5321808"/>
-            <a:ext cx="11027664" cy="868680"/>
+            <a:off x="566928" y="5413248"/>
+            <a:ext cx="11027664" cy="786384"/>
           </a:xfrm>
           <a:prstGeom prst="roundRect">
             <a:avLst>
@@ -9853,8 +9838,8 @@
         </p:nvSpPr>
         <p:spPr>
           <a:xfrm>
-            <a:off x="841248" y="5449824"/>
-            <a:ext cx="10515600" cy="640080"/>
+            <a:off x="841248" y="5541264"/>
+            <a:ext cx="10515600" cy="566928"/>
           </a:xfrm>
           <a:prstGeom prst="rect">
             <a:avLst/>
@@ -9970,23 +9955,23 @@
         </p:nvSpPr>
         <p:spPr>
           <a:xfrm>
-            <a:off x="777240" y="457200"/>
-            <a:ext cx="8595360" cy="457200"/>
-          </a:xfrm>
-          <a:prstGeom prst="rect">
-            <a:avLst/>
-          </a:prstGeom>
-          <a:noFill/>
-        </p:spPr>
-        <p:txBody>
-          <a:bodyPr wrap="square" anchor="t" lIns="0" rIns="0" tIns="0" bIns="0">
-            <a:noAutofit/>
-          </a:bodyPr>
-          <a:lstStyle/>
-          <a:p>
-            <a:pPr algn="l">
-              <a:lnSpc>
-                <a:spcPct val="128000"/>
+            <a:off x="777240" y="438912"/>
+            <a:ext cx="8595360" cy="603504"/>
+          </a:xfrm>
+          <a:prstGeom prst="rect">
+            <a:avLst/>
+          </a:prstGeom>
+          <a:noFill/>
+        </p:spPr>
+        <p:txBody>
+          <a:bodyPr wrap="square" anchor="t" lIns="0" rIns="0" tIns="0" bIns="0">
+            <a:noAutofit/>
+          </a:bodyPr>
+          <a:lstStyle/>
+          <a:p>
+            <a:pPr algn="l">
+              <a:lnSpc>
+                <a:spcPct val="105000"/>
               </a:lnSpc>
               <a:spcBef>
                 <a:spcPts val="0"/>
@@ -10263,7 +10248,6 @@
           <a:ln>
             <a:noFill/>
           </a:ln>
-          <a:effectLst/>
           <a:effectLst>
             <a:outerShdw blurRad="114300" dist="50800" dir="5400000" rotWithShape="0">
               <a:srgbClr val="40210A">
@@ -10459,7 +10443,6 @@
               <a:srgbClr val="EBE0D6"/>
             </a:solidFill>
           </a:ln>
-          <a:effectLst/>
           <a:effectLst>
             <a:outerShdw blurRad="114300" dist="50800" dir="5400000" rotWithShape="0">
               <a:srgbClr val="40210A">
@@ -10655,7 +10638,6 @@
               <a:srgbClr val="EBE0D6"/>
             </a:solidFill>
           </a:ln>
-          <a:effectLst/>
           <a:effectLst>
             <a:outerShdw blurRad="114300" dist="50800" dir="5400000" rotWithShape="0">
               <a:srgbClr val="40210A">
@@ -10851,7 +10833,6 @@
               <a:srgbClr val="EBE0D6"/>
             </a:solidFill>
           </a:ln>
-          <a:effectLst/>
           <a:effectLst>
             <a:outerShdw blurRad="114300" dist="50800" dir="5400000" rotWithShape="0">
               <a:srgbClr val="40210A">
@@ -11047,7 +11028,6 @@
               <a:srgbClr val="EBE0D6"/>
             </a:solidFill>
           </a:ln>
-          <a:effectLst/>
           <a:effectLst>
             <a:outerShdw blurRad="114300" dist="50800" dir="5400000" rotWithShape="0">
               <a:srgbClr val="40210A">
@@ -11243,7 +11223,6 @@
               <a:srgbClr val="EBE0D6"/>
             </a:solidFill>
           </a:ln>
-          <a:effectLst/>
           <a:effectLst>
             <a:outerShdw blurRad="114300" dist="50800" dir="5400000" rotWithShape="0">
               <a:srgbClr val="40210A">
@@ -11485,23 +11464,23 @@
         </p:nvSpPr>
         <p:spPr>
           <a:xfrm>
-            <a:off x="777240" y="457200"/>
-            <a:ext cx="8595360" cy="457200"/>
-          </a:xfrm>
-          <a:prstGeom prst="rect">
-            <a:avLst/>
-          </a:prstGeom>
-          <a:noFill/>
-        </p:spPr>
-        <p:txBody>
-          <a:bodyPr wrap="square" anchor="t" lIns="0" rIns="0" tIns="0" bIns="0">
-            <a:noAutofit/>
-          </a:bodyPr>
-          <a:lstStyle/>
-          <a:p>
-            <a:pPr algn="l">
-              <a:lnSpc>
-                <a:spcPct val="128000"/>
+            <a:off x="777240" y="438912"/>
+            <a:ext cx="8595360" cy="603504"/>
+          </a:xfrm>
+          <a:prstGeom prst="rect">
+            <a:avLst/>
+          </a:prstGeom>
+          <a:noFill/>
+        </p:spPr>
+        <p:txBody>
+          <a:bodyPr wrap="square" anchor="t" lIns="0" rIns="0" tIns="0" bIns="0">
+            <a:noAutofit/>
+          </a:bodyPr>
+          <a:lstStyle/>
+          <a:p>
+            <a:pPr algn="l">
+              <a:lnSpc>
+                <a:spcPct val="105000"/>
               </a:lnSpc>
               <a:spcBef>
                 <a:spcPts val="0"/>
@@ -11764,7 +11743,7 @@
         </p:nvSpPr>
         <p:spPr>
           <a:xfrm>
-            <a:off x="566928" y="1481328"/>
+            <a:off x="566928" y="1463040"/>
             <a:ext cx="11027663" cy="365760"/>
           </a:xfrm>
           <a:prstGeom prst="roundRect">
@@ -11810,7 +11789,7 @@
         </p:nvSpPr>
         <p:spPr>
           <a:xfrm>
-            <a:off x="731520" y="1545336"/>
+            <a:off x="731520" y="1527048"/>
             <a:ext cx="2926080" cy="237744"/>
           </a:xfrm>
           <a:prstGeom prst="rect">
@@ -11857,7 +11836,7 @@
         </p:nvSpPr>
         <p:spPr>
           <a:xfrm>
-            <a:off x="3931920" y="1545336"/>
+            <a:off x="3931920" y="1527048"/>
             <a:ext cx="3840480" cy="237744"/>
           </a:xfrm>
           <a:prstGeom prst="rect">
@@ -11904,7 +11883,7 @@
         </p:nvSpPr>
         <p:spPr>
           <a:xfrm>
-            <a:off x="8046720" y="1545336"/>
+            <a:off x="8046720" y="1527048"/>
             <a:ext cx="3438144" cy="237744"/>
           </a:xfrm>
           <a:prstGeom prst="rect">
@@ -11951,8 +11930,8 @@
         </p:nvSpPr>
         <p:spPr>
           <a:xfrm>
-            <a:off x="566928" y="1901952"/>
-            <a:ext cx="11027663" cy="749808"/>
+            <a:off x="566928" y="1883664"/>
+            <a:ext cx="11027663" cy="713232"/>
           </a:xfrm>
           <a:prstGeom prst="roundRect">
             <a:avLst>
@@ -11999,8 +11978,8 @@
         </p:nvSpPr>
         <p:spPr>
           <a:xfrm>
-            <a:off x="731520" y="1975104"/>
-            <a:ext cx="2926080" cy="621792"/>
+            <a:off x="731520" y="1956816"/>
+            <a:ext cx="2926080" cy="585216"/>
           </a:xfrm>
           <a:prstGeom prst="rect">
             <a:avLst/>
@@ -12070,8 +12049,8 @@
         </p:nvSpPr>
         <p:spPr>
           <a:xfrm>
-            <a:off x="3931920" y="1975104"/>
-            <a:ext cx="3840480" cy="621792"/>
+            <a:off x="3931920" y="1956816"/>
+            <a:ext cx="3840480" cy="585216"/>
           </a:xfrm>
           <a:prstGeom prst="rect">
             <a:avLst/>
@@ -12117,8 +12096,8 @@
         </p:nvSpPr>
         <p:spPr>
           <a:xfrm>
-            <a:off x="8046720" y="1975104"/>
-            <a:ext cx="3438144" cy="621792"/>
+            <a:off x="8046720" y="1956816"/>
+            <a:ext cx="3438144" cy="585216"/>
           </a:xfrm>
           <a:prstGeom prst="rect">
             <a:avLst/>
@@ -12164,8 +12143,8 @@
         </p:nvSpPr>
         <p:spPr>
           <a:xfrm>
-            <a:off x="566928" y="2702052"/>
-            <a:ext cx="11027663" cy="749808"/>
+            <a:off x="566928" y="2647188"/>
+            <a:ext cx="11027663" cy="713232"/>
           </a:xfrm>
           <a:prstGeom prst="roundRect">
             <a:avLst>
@@ -12212,8 +12191,8 @@
         </p:nvSpPr>
         <p:spPr>
           <a:xfrm>
-            <a:off x="731520" y="2775204"/>
-            <a:ext cx="2926080" cy="621792"/>
+            <a:off x="731520" y="2720340"/>
+            <a:ext cx="2926080" cy="585216"/>
           </a:xfrm>
           <a:prstGeom prst="rect">
             <a:avLst/>
@@ -12259,8 +12238,8 @@
         </p:nvSpPr>
         <p:spPr>
           <a:xfrm>
-            <a:off x="3931920" y="2775204"/>
-            <a:ext cx="3840480" cy="621792"/>
+            <a:off x="3931920" y="2720340"/>
+            <a:ext cx="3840480" cy="585216"/>
           </a:xfrm>
           <a:prstGeom prst="rect">
             <a:avLst/>
@@ -12306,8 +12285,8 @@
         </p:nvSpPr>
         <p:spPr>
           <a:xfrm>
-            <a:off x="8046720" y="2775204"/>
-            <a:ext cx="3438144" cy="621792"/>
+            <a:off x="8046720" y="2720340"/>
+            <a:ext cx="3438144" cy="585216"/>
           </a:xfrm>
           <a:prstGeom prst="rect">
             <a:avLst/>
@@ -12353,8 +12332,8 @@
         </p:nvSpPr>
         <p:spPr>
           <a:xfrm>
-            <a:off x="566928" y="3502152"/>
-            <a:ext cx="11027663" cy="749808"/>
+            <a:off x="566928" y="3410712"/>
+            <a:ext cx="11027663" cy="713232"/>
           </a:xfrm>
           <a:prstGeom prst="roundRect">
             <a:avLst>
@@ -12401,8 +12380,8 @@
         </p:nvSpPr>
         <p:spPr>
           <a:xfrm>
-            <a:off x="731520" y="3575304"/>
-            <a:ext cx="2926080" cy="621792"/>
+            <a:off x="731520" y="3483864"/>
+            <a:ext cx="2926080" cy="585216"/>
           </a:xfrm>
           <a:prstGeom prst="rect">
             <a:avLst/>
@@ -12448,8 +12427,8 @@
         </p:nvSpPr>
         <p:spPr>
           <a:xfrm>
-            <a:off x="3931920" y="3575304"/>
-            <a:ext cx="3840480" cy="621792"/>
+            <a:off x="3931920" y="3483864"/>
+            <a:ext cx="3840480" cy="585216"/>
           </a:xfrm>
           <a:prstGeom prst="rect">
             <a:avLst/>
@@ -12495,8 +12474,8 @@
         </p:nvSpPr>
         <p:spPr>
           <a:xfrm>
-            <a:off x="8046720" y="3575304"/>
-            <a:ext cx="3438144" cy="621792"/>
+            <a:off x="8046720" y="3483864"/>
+            <a:ext cx="3438144" cy="585216"/>
           </a:xfrm>
           <a:prstGeom prst="rect">
             <a:avLst/>
@@ -12542,8 +12521,8 @@
         </p:nvSpPr>
         <p:spPr>
           <a:xfrm>
-            <a:off x="566928" y="4302252"/>
-            <a:ext cx="11027663" cy="749808"/>
+            <a:off x="566928" y="4174236"/>
+            <a:ext cx="11027663" cy="713232"/>
           </a:xfrm>
           <a:prstGeom prst="roundRect">
             <a:avLst>
@@ -12590,8 +12569,8 @@
         </p:nvSpPr>
         <p:spPr>
           <a:xfrm>
-            <a:off x="731520" y="4375404"/>
-            <a:ext cx="2926080" cy="621792"/>
+            <a:off x="731520" y="4247388"/>
+            <a:ext cx="2926080" cy="585216"/>
           </a:xfrm>
           <a:prstGeom prst="rect">
             <a:avLst/>
@@ -12637,8 +12616,8 @@
         </p:nvSpPr>
         <p:spPr>
           <a:xfrm>
-            <a:off x="3931920" y="4375404"/>
-            <a:ext cx="3840480" cy="621792"/>
+            <a:off x="3931920" y="4247388"/>
+            <a:ext cx="3840480" cy="585216"/>
           </a:xfrm>
           <a:prstGeom prst="rect">
             <a:avLst/>
@@ -12684,8 +12663,8 @@
         </p:nvSpPr>
         <p:spPr>
           <a:xfrm>
-            <a:off x="8046720" y="4375404"/>
-            <a:ext cx="3438144" cy="621792"/>
+            <a:off x="8046720" y="4247388"/>
+            <a:ext cx="3438144" cy="585216"/>
           </a:xfrm>
           <a:prstGeom prst="rect">
             <a:avLst/>
@@ -12731,8 +12710,8 @@
         </p:nvSpPr>
         <p:spPr>
           <a:xfrm>
-            <a:off x="566928" y="5102352"/>
-            <a:ext cx="11027663" cy="749808"/>
+            <a:off x="566928" y="4937760"/>
+            <a:ext cx="11027663" cy="713232"/>
           </a:xfrm>
           <a:prstGeom prst="roundRect">
             <a:avLst>
@@ -12779,8 +12758,8 @@
         </p:nvSpPr>
         <p:spPr>
           <a:xfrm>
-            <a:off x="731520" y="5175504"/>
-            <a:ext cx="2926080" cy="621792"/>
+            <a:off x="731520" y="5010912"/>
+            <a:ext cx="2926080" cy="585216"/>
           </a:xfrm>
           <a:prstGeom prst="rect">
             <a:avLst/>
@@ -12826,8 +12805,8 @@
         </p:nvSpPr>
         <p:spPr>
           <a:xfrm>
-            <a:off x="3931920" y="5175504"/>
-            <a:ext cx="3840480" cy="621792"/>
+            <a:off x="3931920" y="5010912"/>
+            <a:ext cx="3840480" cy="585216"/>
           </a:xfrm>
           <a:prstGeom prst="rect">
             <a:avLst/>
@@ -12873,8 +12852,8 @@
         </p:nvSpPr>
         <p:spPr>
           <a:xfrm>
-            <a:off x="8046720" y="5175504"/>
-            <a:ext cx="3438144" cy="621792"/>
+            <a:off x="8046720" y="5010912"/>
+            <a:ext cx="3438144" cy="585216"/>
           </a:xfrm>
           <a:prstGeom prst="rect">
             <a:avLst/>
@@ -12920,8 +12899,8 @@
         </p:nvSpPr>
         <p:spPr>
           <a:xfrm>
-            <a:off x="566928" y="5742432"/>
-            <a:ext cx="11027664" cy="457200"/>
+            <a:off x="566928" y="5870448"/>
+            <a:ext cx="11027664" cy="384048"/>
           </a:xfrm>
           <a:prstGeom prst="roundRect">
             <a:avLst>
@@ -12968,8 +12947,8 @@
         </p:nvSpPr>
         <p:spPr>
           <a:xfrm>
-            <a:off x="804672" y="5833872"/>
-            <a:ext cx="10515600" cy="274320"/>
+            <a:off x="804672" y="5943600"/>
+            <a:ext cx="10515600" cy="256032"/>
           </a:xfrm>
           <a:prstGeom prst="rect">
             <a:avLst/>
@@ -13085,23 +13064,23 @@
         </p:nvSpPr>
         <p:spPr>
           <a:xfrm>
-            <a:off x="777240" y="457200"/>
-            <a:ext cx="8595360" cy="457200"/>
-          </a:xfrm>
-          <a:prstGeom prst="rect">
-            <a:avLst/>
-          </a:prstGeom>
-          <a:noFill/>
-        </p:spPr>
-        <p:txBody>
-          <a:bodyPr wrap="square" anchor="t" lIns="0" rIns="0" tIns="0" bIns="0">
-            <a:noAutofit/>
-          </a:bodyPr>
-          <a:lstStyle/>
-          <a:p>
-            <a:pPr algn="l">
-              <a:lnSpc>
-                <a:spcPct val="128000"/>
+            <a:off x="777240" y="438912"/>
+            <a:ext cx="8595360" cy="603504"/>
+          </a:xfrm>
+          <a:prstGeom prst="rect">
+            <a:avLst/>
+          </a:prstGeom>
+          <a:noFill/>
+        </p:spPr>
+        <p:txBody>
+          <a:bodyPr wrap="square" anchor="t" lIns="0" rIns="0" tIns="0" bIns="0">
+            <a:noAutofit/>
+          </a:bodyPr>
+          <a:lstStyle/>
+          <a:p>
+            <a:pPr algn="l">
+              <a:lnSpc>
+                <a:spcPct val="105000"/>
               </a:lnSpc>
               <a:spcBef>
                 <a:spcPts val="0"/>
@@ -13380,7 +13359,6 @@
               <a:srgbClr val="EBE0D6"/>
             </a:solidFill>
           </a:ln>
-          <a:effectLst/>
           <a:effectLst>
             <a:outerShdw blurRad="114300" dist="50800" dir="5400000" rotWithShape="0">
               <a:srgbClr val="40210A">
@@ -13573,7 +13551,6 @@
               <a:srgbClr val="EBE0D6"/>
             </a:solidFill>
           </a:ln>
-          <a:effectLst/>
           <a:effectLst>
             <a:outerShdw blurRad="114300" dist="50800" dir="5400000" rotWithShape="0">
               <a:srgbClr val="40210A">
@@ -13766,7 +13743,6 @@
               <a:srgbClr val="EBE0D6"/>
             </a:solidFill>
           </a:ln>
-          <a:effectLst/>
           <a:effectLst>
             <a:outerShdw blurRad="114300" dist="50800" dir="5400000" rotWithShape="0">
               <a:srgbClr val="40210A">
@@ -13959,7 +13935,6 @@
               <a:srgbClr val="EBE0D6"/>
             </a:solidFill>
           </a:ln>
-          <a:effectLst/>
           <a:effectLst>
             <a:outerShdw blurRad="114300" dist="50800" dir="5400000" rotWithShape="0">
               <a:srgbClr val="40210A">
@@ -15704,7 +15679,6 @@
               <a:srgbClr val="EBE0D6"/>
             </a:solidFill>
           </a:ln>
-          <a:effectLst/>
           <a:effectLst>
             <a:outerShdw blurRad="114300" dist="50800" dir="5400000" rotWithShape="0">
               <a:srgbClr val="40210A">
@@ -15900,7 +15874,6 @@
               <a:srgbClr val="EBE0D6"/>
             </a:solidFill>
           </a:ln>
-          <a:effectLst/>
           <a:effectLst>
             <a:outerShdw blurRad="114300" dist="50800" dir="5400000" rotWithShape="0">
               <a:srgbClr val="40210A">
@@ -16096,7 +16069,6 @@
               <a:srgbClr val="EBE0D6"/>
             </a:solidFill>
           </a:ln>
-          <a:effectLst/>
           <a:effectLst>
             <a:outerShdw blurRad="114300" dist="50800" dir="5400000" rotWithShape="0">
               <a:srgbClr val="40210A">
@@ -16292,7 +16264,6 @@
               <a:srgbClr val="EBE0D6"/>
             </a:solidFill>
           </a:ln>
-          <a:effectLst/>
           <a:effectLst>
             <a:outerShdw blurRad="114300" dist="50800" dir="5400000" rotWithShape="0">
               <a:srgbClr val="40210A">
@@ -16488,7 +16459,6 @@
               <a:srgbClr val="EBE0D6"/>
             </a:solidFill>
           </a:ln>
-          <a:effectLst/>
           <a:effectLst>
             <a:outerShdw blurRad="114300" dist="50800" dir="5400000" rotWithShape="0">
               <a:srgbClr val="40210A">
@@ -16684,7 +16654,6 @@
               <a:srgbClr val="EBE0D6"/>
             </a:solidFill>
           </a:ln>
-          <a:effectLst/>
           <a:effectLst>
             <a:outerShdw blurRad="114300" dist="50800" dir="5400000" rotWithShape="0">
               <a:srgbClr val="40210A">
@@ -16880,7 +16849,6 @@
               <a:srgbClr val="EBE0D6"/>
             </a:solidFill>
           </a:ln>
-          <a:effectLst/>
           <a:effectLst>
             <a:outerShdw blurRad="114300" dist="50800" dir="5400000" rotWithShape="0">
               <a:srgbClr val="40210A">
@@ -17076,7 +17044,6 @@
               <a:srgbClr val="EBE0D6"/>
             </a:solidFill>
           </a:ln>
-          <a:effectLst/>
           <a:effectLst>
             <a:outerShdw blurRad="114300" dist="50800" dir="5400000" rotWithShape="0">
               <a:srgbClr val="40210A">
@@ -17456,23 +17423,23 @@
         </p:nvSpPr>
         <p:spPr>
           <a:xfrm>
-            <a:off x="777240" y="457200"/>
-            <a:ext cx="8595360" cy="457200"/>
-          </a:xfrm>
-          <a:prstGeom prst="rect">
-            <a:avLst/>
-          </a:prstGeom>
-          <a:noFill/>
-        </p:spPr>
-        <p:txBody>
-          <a:bodyPr wrap="square" anchor="t" lIns="0" rIns="0" tIns="0" bIns="0">
-            <a:noAutofit/>
-          </a:bodyPr>
-          <a:lstStyle/>
-          <a:p>
-            <a:pPr algn="l">
-              <a:lnSpc>
-                <a:spcPct val="128000"/>
+            <a:off x="777240" y="438912"/>
+            <a:ext cx="8595360" cy="603504"/>
+          </a:xfrm>
+          <a:prstGeom prst="rect">
+            <a:avLst/>
+          </a:prstGeom>
+          <a:noFill/>
+        </p:spPr>
+        <p:txBody>
+          <a:bodyPr wrap="square" anchor="t" lIns="0" rIns="0" tIns="0" bIns="0">
+            <a:noAutofit/>
+          </a:bodyPr>
+          <a:lstStyle/>
+          <a:p>
+            <a:pPr algn="l">
+              <a:lnSpc>
+                <a:spcPct val="105000"/>
               </a:lnSpc>
               <a:spcBef>
                 <a:spcPts val="0"/>
@@ -17749,7 +17716,6 @@
           <a:ln>
             <a:noFill/>
           </a:ln>
-          <a:effectLst/>
           <a:effectLst>
             <a:outerShdw blurRad="114300" dist="50800" dir="5400000" rotWithShape="0">
               <a:srgbClr val="40210A">
@@ -18011,7 +17977,6 @@
           <a:ln>
             <a:noFill/>
           </a:ln>
-          <a:effectLst/>
           <a:effectLst>
             <a:outerShdw blurRad="114300" dist="50800" dir="5400000" rotWithShape="0">
               <a:srgbClr val="40210A">
@@ -18273,7 +18238,6 @@
           <a:ln>
             <a:noFill/>
           </a:ln>
-          <a:effectLst/>
           <a:effectLst>
             <a:outerShdw blurRad="114300" dist="50800" dir="5400000" rotWithShape="0">
               <a:srgbClr val="40210A">
@@ -18535,7 +18499,6 @@
           <a:ln>
             <a:noFill/>
           </a:ln>
-          <a:effectLst/>
           <a:effectLst>
             <a:outerShdw blurRad="114300" dist="50800" dir="5400000" rotWithShape="0">
               <a:srgbClr val="40210A">
@@ -19057,23 +19020,23 @@
         </p:nvSpPr>
         <p:spPr>
           <a:xfrm>
-            <a:off x="777240" y="457200"/>
-            <a:ext cx="8595360" cy="457200"/>
-          </a:xfrm>
-          <a:prstGeom prst="rect">
-            <a:avLst/>
-          </a:prstGeom>
-          <a:noFill/>
-        </p:spPr>
-        <p:txBody>
-          <a:bodyPr wrap="square" anchor="t" lIns="0" rIns="0" tIns="0" bIns="0">
-            <a:noAutofit/>
-          </a:bodyPr>
-          <a:lstStyle/>
-          <a:p>
-            <a:pPr algn="l">
-              <a:lnSpc>
-                <a:spcPct val="128000"/>
+            <a:off x="777240" y="438912"/>
+            <a:ext cx="8595360" cy="603504"/>
+          </a:xfrm>
+          <a:prstGeom prst="rect">
+            <a:avLst/>
+          </a:prstGeom>
+          <a:noFill/>
+        </p:spPr>
+        <p:txBody>
+          <a:bodyPr wrap="square" anchor="t" lIns="0" rIns="0" tIns="0" bIns="0">
+            <a:noAutofit/>
+          </a:bodyPr>
+          <a:lstStyle/>
+          <a:p>
+            <a:pPr algn="l">
+              <a:lnSpc>
+                <a:spcPct val="105000"/>
               </a:lnSpc>
               <a:spcBef>
                 <a:spcPts val="0"/>
@@ -19336,8 +19299,8 @@
         </p:nvSpPr>
         <p:spPr>
           <a:xfrm>
-            <a:off x="566928" y="1481328"/>
-            <a:ext cx="5431536" cy="1591056"/>
+            <a:off x="566928" y="1463040"/>
+            <a:ext cx="5431536" cy="1682496"/>
           </a:xfrm>
           <a:prstGeom prst="roundRect">
             <a:avLst>
@@ -19352,7 +19315,6 @@
               <a:srgbClr val="EBE0D6"/>
             </a:solidFill>
           </a:ln>
-          <a:effectLst/>
           <a:effectLst>
             <a:outerShdw blurRad="114300" dist="50800" dir="5400000" rotWithShape="0">
               <a:srgbClr val="40210A">
@@ -19391,8 +19353,8 @@
         </p:nvSpPr>
         <p:spPr>
           <a:xfrm>
-            <a:off x="566928" y="1481328"/>
-            <a:ext cx="54864" cy="1591056"/>
+            <a:off x="566928" y="1463040"/>
+            <a:ext cx="54864" cy="1682496"/>
           </a:xfrm>
           <a:prstGeom prst="rect">
             <a:avLst/>
@@ -19435,7 +19397,7 @@
         </p:nvSpPr>
         <p:spPr>
           <a:xfrm>
-            <a:off x="822960" y="1700784"/>
+            <a:off x="822960" y="1682496"/>
             <a:ext cx="365760" cy="365760"/>
           </a:xfrm>
           <a:prstGeom prst="ellipse">
@@ -19490,7 +19452,7 @@
         </p:nvSpPr>
         <p:spPr>
           <a:xfrm>
-            <a:off x="1353312" y="1682496"/>
+            <a:off x="1353312" y="1664208"/>
             <a:ext cx="1828800" cy="310896"/>
           </a:xfrm>
           <a:prstGeom prst="rect">
@@ -19537,7 +19499,7 @@
         </p:nvSpPr>
         <p:spPr>
           <a:xfrm>
-            <a:off x="1353312" y="2011680"/>
+            <a:off x="1353312" y="1993392"/>
             <a:ext cx="3931920" cy="274320"/>
           </a:xfrm>
           <a:prstGeom prst="rect">
@@ -19584,8 +19546,8 @@
         </p:nvSpPr>
         <p:spPr>
           <a:xfrm>
-            <a:off x="841247" y="2359152"/>
-            <a:ext cx="4846320" cy="640080"/>
+            <a:off x="841247" y="2331720"/>
+            <a:ext cx="4937760" cy="749808"/>
           </a:xfrm>
           <a:prstGeom prst="rect">
             <a:avLst/>
@@ -19610,7 +19572,7 @@
               </a:spcAft>
             </a:pPr>
             <a:r>
-              <a:rPr sz="980" b="0" i="0">
+              <a:rPr sz="950" b="0" i="0">
                 <a:solidFill>
                   <a:srgbClr val="6E7686"/>
                 </a:solidFill>
@@ -19634,7 +19596,7 @@
               </a:spcAft>
             </a:pPr>
             <a:r>
-              <a:rPr sz="980" b="0" i="0">
+              <a:rPr sz="950" b="0" i="0">
                 <a:solidFill>
                   <a:srgbClr val="6E7686"/>
                 </a:solidFill>
@@ -19655,8 +19617,8 @@
         </p:nvSpPr>
         <p:spPr>
           <a:xfrm>
-            <a:off x="6163056" y="1481328"/>
-            <a:ext cx="5431536" cy="1591056"/>
+            <a:off x="6163056" y="1463040"/>
+            <a:ext cx="5431536" cy="1682496"/>
           </a:xfrm>
           <a:prstGeom prst="roundRect">
             <a:avLst>
@@ -19671,7 +19633,6 @@
               <a:srgbClr val="EBE0D6"/>
             </a:solidFill>
           </a:ln>
-          <a:effectLst/>
           <a:effectLst>
             <a:outerShdw blurRad="114300" dist="50800" dir="5400000" rotWithShape="0">
               <a:srgbClr val="40210A">
@@ -19710,8 +19671,8 @@
         </p:nvSpPr>
         <p:spPr>
           <a:xfrm>
-            <a:off x="6163056" y="1481328"/>
-            <a:ext cx="54864" cy="1591056"/>
+            <a:off x="6163056" y="1463040"/>
+            <a:ext cx="54864" cy="1682496"/>
           </a:xfrm>
           <a:prstGeom prst="rect">
             <a:avLst/>
@@ -19754,7 +19715,7 @@
         </p:nvSpPr>
         <p:spPr>
           <a:xfrm>
-            <a:off x="6419088" y="1700784"/>
+            <a:off x="6419088" y="1682496"/>
             <a:ext cx="365760" cy="365760"/>
           </a:xfrm>
           <a:prstGeom prst="ellipse">
@@ -19809,7 +19770,7 @@
         </p:nvSpPr>
         <p:spPr>
           <a:xfrm>
-            <a:off x="6949440" y="1682496"/>
+            <a:off x="6949440" y="1664208"/>
             <a:ext cx="1828800" cy="310896"/>
           </a:xfrm>
           <a:prstGeom prst="rect">
@@ -19856,7 +19817,7 @@
         </p:nvSpPr>
         <p:spPr>
           <a:xfrm>
-            <a:off x="6949440" y="2011680"/>
+            <a:off x="6949440" y="1993392"/>
             <a:ext cx="3931920" cy="274320"/>
           </a:xfrm>
           <a:prstGeom prst="rect">
@@ -19903,8 +19864,8 @@
         </p:nvSpPr>
         <p:spPr>
           <a:xfrm>
-            <a:off x="6437376" y="2359152"/>
-            <a:ext cx="4846320" cy="640080"/>
+            <a:off x="6437376" y="2331720"/>
+            <a:ext cx="4937760" cy="749808"/>
           </a:xfrm>
           <a:prstGeom prst="rect">
             <a:avLst/>
@@ -19929,7 +19890,7 @@
               </a:spcAft>
             </a:pPr>
             <a:r>
-              <a:rPr sz="980" b="0" i="0">
+              <a:rPr sz="950" b="0" i="0">
                 <a:solidFill>
                   <a:srgbClr val="6E7686"/>
                 </a:solidFill>
@@ -19953,7 +19914,7 @@
               </a:spcAft>
             </a:pPr>
             <a:r>
-              <a:rPr sz="980" b="0" i="0">
+              <a:rPr sz="950" b="0" i="0">
                 <a:solidFill>
                   <a:srgbClr val="6E7686"/>
                 </a:solidFill>
@@ -19974,8 +19935,8 @@
         </p:nvSpPr>
         <p:spPr>
           <a:xfrm>
-            <a:off x="566928" y="3255264"/>
-            <a:ext cx="5431536" cy="1591056"/>
+            <a:off x="566928" y="3282696"/>
+            <a:ext cx="5431536" cy="1682496"/>
           </a:xfrm>
           <a:prstGeom prst="roundRect">
             <a:avLst>
@@ -19990,7 +19951,6 @@
               <a:srgbClr val="EBE0D6"/>
             </a:solidFill>
           </a:ln>
-          <a:effectLst/>
           <a:effectLst>
             <a:outerShdw blurRad="114300" dist="50800" dir="5400000" rotWithShape="0">
               <a:srgbClr val="40210A">
@@ -20029,8 +19989,8 @@
         </p:nvSpPr>
         <p:spPr>
           <a:xfrm>
-            <a:off x="566928" y="3255264"/>
-            <a:ext cx="54864" cy="1591056"/>
+            <a:off x="566928" y="3282696"/>
+            <a:ext cx="54864" cy="1682496"/>
           </a:xfrm>
           <a:prstGeom prst="rect">
             <a:avLst/>
@@ -20073,7 +20033,7 @@
         </p:nvSpPr>
         <p:spPr>
           <a:xfrm>
-            <a:off x="822960" y="3474720"/>
+            <a:off x="822960" y="3502152"/>
             <a:ext cx="365760" cy="365760"/>
           </a:xfrm>
           <a:prstGeom prst="ellipse">
@@ -20128,7 +20088,7 @@
         </p:nvSpPr>
         <p:spPr>
           <a:xfrm>
-            <a:off x="1353312" y="3456432"/>
+            <a:off x="1353312" y="3483864"/>
             <a:ext cx="1828800" cy="310896"/>
           </a:xfrm>
           <a:prstGeom prst="rect">
@@ -20175,7 +20135,7 @@
         </p:nvSpPr>
         <p:spPr>
           <a:xfrm>
-            <a:off x="1353312" y="3785615"/>
+            <a:off x="1353312" y="3813048"/>
             <a:ext cx="3931920" cy="274320"/>
           </a:xfrm>
           <a:prstGeom prst="rect">
@@ -20222,8 +20182,8 @@
         </p:nvSpPr>
         <p:spPr>
           <a:xfrm>
-            <a:off x="841247" y="4133087"/>
-            <a:ext cx="4846320" cy="640080"/>
+            <a:off x="841247" y="4151376"/>
+            <a:ext cx="4937760" cy="749808"/>
           </a:xfrm>
           <a:prstGeom prst="rect">
             <a:avLst/>
@@ -20248,7 +20208,7 @@
               </a:spcAft>
             </a:pPr>
             <a:r>
-              <a:rPr sz="980" b="0" i="0">
+              <a:rPr sz="950" b="0" i="0">
                 <a:solidFill>
                   <a:srgbClr val="6E7686"/>
                 </a:solidFill>
@@ -20272,7 +20232,7 @@
               </a:spcAft>
             </a:pPr>
             <a:r>
-              <a:rPr sz="980" b="0" i="0">
+              <a:rPr sz="950" b="0" i="0">
                 <a:solidFill>
                   <a:srgbClr val="6E7686"/>
                 </a:solidFill>
@@ -20293,8 +20253,8 @@
         </p:nvSpPr>
         <p:spPr>
           <a:xfrm>
-            <a:off x="6163056" y="3255264"/>
-            <a:ext cx="5431536" cy="1591056"/>
+            <a:off x="6163056" y="3282696"/>
+            <a:ext cx="5431536" cy="1682496"/>
           </a:xfrm>
           <a:prstGeom prst="roundRect">
             <a:avLst>
@@ -20309,7 +20269,6 @@
               <a:srgbClr val="EBE0D6"/>
             </a:solidFill>
           </a:ln>
-          <a:effectLst/>
           <a:effectLst>
             <a:outerShdw blurRad="114300" dist="50800" dir="5400000" rotWithShape="0">
               <a:srgbClr val="40210A">
@@ -20348,8 +20307,8 @@
         </p:nvSpPr>
         <p:spPr>
           <a:xfrm>
-            <a:off x="6163056" y="3255264"/>
-            <a:ext cx="54864" cy="1591056"/>
+            <a:off x="6163056" y="3282696"/>
+            <a:ext cx="54864" cy="1682496"/>
           </a:xfrm>
           <a:prstGeom prst="rect">
             <a:avLst/>
@@ -20392,7 +20351,7 @@
         </p:nvSpPr>
         <p:spPr>
           <a:xfrm>
-            <a:off x="6419088" y="3474720"/>
+            <a:off x="6419088" y="3502152"/>
             <a:ext cx="365760" cy="365760"/>
           </a:xfrm>
           <a:prstGeom prst="ellipse">
@@ -20447,7 +20406,7 @@
         </p:nvSpPr>
         <p:spPr>
           <a:xfrm>
-            <a:off x="6949440" y="3456432"/>
+            <a:off x="6949440" y="3483864"/>
             <a:ext cx="1828800" cy="310896"/>
           </a:xfrm>
           <a:prstGeom prst="rect">
@@ -20494,7 +20453,7 @@
         </p:nvSpPr>
         <p:spPr>
           <a:xfrm>
-            <a:off x="6949440" y="3785615"/>
+            <a:off x="6949440" y="3813048"/>
             <a:ext cx="3931920" cy="274320"/>
           </a:xfrm>
           <a:prstGeom prst="rect">
@@ -20541,8 +20500,8 @@
         </p:nvSpPr>
         <p:spPr>
           <a:xfrm>
-            <a:off x="6437376" y="4133087"/>
-            <a:ext cx="4846320" cy="640080"/>
+            <a:off x="6437376" y="4151376"/>
+            <a:ext cx="4937760" cy="749808"/>
           </a:xfrm>
           <a:prstGeom prst="rect">
             <a:avLst/>
@@ -20567,7 +20526,7 @@
               </a:spcAft>
             </a:pPr>
             <a:r>
-              <a:rPr sz="980" b="0" i="0">
+              <a:rPr sz="950" b="0" i="0">
                 <a:solidFill>
                   <a:srgbClr val="6E7686"/>
                 </a:solidFill>
@@ -20751,23 +20710,23 @@
         </p:nvSpPr>
         <p:spPr>
           <a:xfrm>
-            <a:off x="777240" y="457200"/>
-            <a:ext cx="8595360" cy="457200"/>
-          </a:xfrm>
-          <a:prstGeom prst="rect">
-            <a:avLst/>
-          </a:prstGeom>
-          <a:noFill/>
-        </p:spPr>
-        <p:txBody>
-          <a:bodyPr wrap="square" anchor="t" lIns="0" rIns="0" tIns="0" bIns="0">
-            <a:noAutofit/>
-          </a:bodyPr>
-          <a:lstStyle/>
-          <a:p>
-            <a:pPr algn="l">
-              <a:lnSpc>
-                <a:spcPct val="128000"/>
+            <a:off x="777240" y="438912"/>
+            <a:ext cx="8595360" cy="603504"/>
+          </a:xfrm>
+          <a:prstGeom prst="rect">
+            <a:avLst/>
+          </a:prstGeom>
+          <a:noFill/>
+        </p:spPr>
+        <p:txBody>
+          <a:bodyPr wrap="square" anchor="t" lIns="0" rIns="0" tIns="0" bIns="0">
+            <a:noAutofit/>
+          </a:bodyPr>
+          <a:lstStyle/>
+          <a:p>
+            <a:pPr algn="l">
+              <a:lnSpc>
+                <a:spcPct val="105000"/>
               </a:lnSpc>
               <a:spcBef>
                 <a:spcPts val="0"/>
@@ -21044,7 +21003,6 @@
           <a:ln>
             <a:noFill/>
           </a:ln>
-          <a:effectLst/>
           <a:effectLst>
             <a:outerShdw blurRad="114300" dist="50800" dir="5400000" rotWithShape="0">
               <a:srgbClr val="40210A">
@@ -21146,7 +21104,6 @@
               <a:srgbClr val="EBE0D6"/>
             </a:solidFill>
           </a:ln>
-          <a:effectLst/>
           <a:effectLst>
             <a:outerShdw blurRad="114300" dist="50800" dir="5400000" rotWithShape="0">
               <a:srgbClr val="40210A">
@@ -21293,7 +21250,6 @@
           <a:ln>
             <a:noFill/>
           </a:ln>
-          <a:effectLst/>
           <a:effectLst>
             <a:outerShdw blurRad="114300" dist="50800" dir="5400000" rotWithShape="0">
               <a:srgbClr val="40210A">
@@ -21395,7 +21351,6 @@
               <a:srgbClr val="EBE0D6"/>
             </a:solidFill>
           </a:ln>
-          <a:effectLst/>
           <a:effectLst>
             <a:outerShdw blurRad="114300" dist="50800" dir="5400000" rotWithShape="0">
               <a:srgbClr val="40210A">
@@ -21542,7 +21497,6 @@
           <a:ln>
             <a:noFill/>
           </a:ln>
-          <a:effectLst/>
           <a:effectLst>
             <a:outerShdw blurRad="114300" dist="50800" dir="5400000" rotWithShape="0">
               <a:srgbClr val="40210A">
@@ -21644,7 +21598,6 @@
               <a:srgbClr val="EBE0D6"/>
             </a:solidFill>
           </a:ln>
-          <a:effectLst/>
           <a:effectLst>
             <a:outerShdw blurRad="114300" dist="50800" dir="5400000" rotWithShape="0">
               <a:srgbClr val="40210A">
@@ -21791,7 +21744,6 @@
           <a:ln>
             <a:noFill/>
           </a:ln>
-          <a:effectLst/>
           <a:effectLst>
             <a:outerShdw blurRad="114300" dist="50800" dir="5400000" rotWithShape="0">
               <a:srgbClr val="40210A">
@@ -21893,7 +21845,6 @@
               <a:srgbClr val="EBE0D6"/>
             </a:solidFill>
           </a:ln>
-          <a:effectLst/>
           <a:effectLst>
             <a:outerShdw blurRad="114300" dist="50800" dir="5400000" rotWithShape="0">
               <a:srgbClr val="40210A">
@@ -22040,7 +21991,6 @@
           <a:ln>
             <a:noFill/>
           </a:ln>
-          <a:effectLst/>
           <a:effectLst>
             <a:outerShdw blurRad="114300" dist="50800" dir="5400000" rotWithShape="0">
               <a:srgbClr val="40210A">
@@ -22142,7 +22092,6 @@
               <a:srgbClr val="EBE0D6"/>
             </a:solidFill>
           </a:ln>
-          <a:effectLst/>
           <a:effectLst>
             <a:outerShdw blurRad="114300" dist="50800" dir="5400000" rotWithShape="0">
               <a:srgbClr val="40210A">
@@ -22289,7 +22238,6 @@
           <a:ln>
             <a:noFill/>
           </a:ln>
-          <a:effectLst/>
           <a:effectLst>
             <a:outerShdw blurRad="114300" dist="50800" dir="5400000" rotWithShape="0">
               <a:srgbClr val="40210A">
@@ -22391,7 +22339,6 @@
               <a:srgbClr val="EBE0D6"/>
             </a:solidFill>
           </a:ln>
-          <a:effectLst/>
           <a:effectLst>
             <a:outerShdw blurRad="114300" dist="50800" dir="5400000" rotWithShape="0">
               <a:srgbClr val="40210A">
@@ -22633,23 +22580,23 @@
         </p:nvSpPr>
         <p:spPr>
           <a:xfrm>
-            <a:off x="777240" y="457200"/>
-            <a:ext cx="8595360" cy="457200"/>
-          </a:xfrm>
-          <a:prstGeom prst="rect">
-            <a:avLst/>
-          </a:prstGeom>
-          <a:noFill/>
-        </p:spPr>
-        <p:txBody>
-          <a:bodyPr wrap="square" anchor="t" lIns="0" rIns="0" tIns="0" bIns="0">
-            <a:noAutofit/>
-          </a:bodyPr>
-          <a:lstStyle/>
-          <a:p>
-            <a:pPr algn="l">
-              <a:lnSpc>
-                <a:spcPct val="128000"/>
+            <a:off x="777240" y="438912"/>
+            <a:ext cx="8595360" cy="603504"/>
+          </a:xfrm>
+          <a:prstGeom prst="rect">
+            <a:avLst/>
+          </a:prstGeom>
+          <a:noFill/>
+        </p:spPr>
+        <p:txBody>
+          <a:bodyPr wrap="square" anchor="t" lIns="0" rIns="0" tIns="0" bIns="0">
+            <a:noAutofit/>
+          </a:bodyPr>
+          <a:lstStyle/>
+          <a:p>
+            <a:pPr algn="l">
+              <a:lnSpc>
+                <a:spcPct val="105000"/>
               </a:lnSpc>
               <a:spcBef>
                 <a:spcPts val="0"/>
@@ -22926,7 +22873,6 @@
           <a:ln>
             <a:noFill/>
           </a:ln>
-          <a:effectLst/>
           <a:effectLst>
             <a:outerShdw blurRad="114300" dist="50800" dir="5400000" rotWithShape="0">
               <a:srgbClr val="40210A">
@@ -23176,7 +23122,6 @@
           <a:ln>
             <a:noFill/>
           </a:ln>
-          <a:effectLst/>
           <a:effectLst>
             <a:outerShdw blurRad="114300" dist="50800" dir="5400000" rotWithShape="0">
               <a:srgbClr val="40210A">
@@ -23426,7 +23371,6 @@
           <a:ln>
             <a:noFill/>
           </a:ln>
-          <a:effectLst/>
           <a:effectLst>
             <a:outerShdw blurRad="114300" dist="50800" dir="5400000" rotWithShape="0">
               <a:srgbClr val="40210A">
@@ -23676,7 +23620,6 @@
           <a:ln>
             <a:noFill/>
           </a:ln>
-          <a:effectLst/>
           <a:effectLst>
             <a:outerShdw blurRad="114300" dist="50800" dir="5400000" rotWithShape="0">
               <a:srgbClr val="40210A">
@@ -23926,7 +23869,6 @@
           <a:ln>
             <a:noFill/>
           </a:ln>
-          <a:effectLst/>
           <a:effectLst>
             <a:outerShdw blurRad="114300" dist="50800" dir="5400000" rotWithShape="0">
               <a:srgbClr val="40210A">
@@ -24224,23 +24166,23 @@
         </p:nvSpPr>
         <p:spPr>
           <a:xfrm>
-            <a:off x="777240" y="457200"/>
-            <a:ext cx="8595360" cy="457200"/>
-          </a:xfrm>
-          <a:prstGeom prst="rect">
-            <a:avLst/>
-          </a:prstGeom>
-          <a:noFill/>
-        </p:spPr>
-        <p:txBody>
-          <a:bodyPr wrap="square" anchor="t" lIns="0" rIns="0" tIns="0" bIns="0">
-            <a:noAutofit/>
-          </a:bodyPr>
-          <a:lstStyle/>
-          <a:p>
-            <a:pPr algn="l">
-              <a:lnSpc>
-                <a:spcPct val="128000"/>
+            <a:off x="777240" y="438912"/>
+            <a:ext cx="8595360" cy="603504"/>
+          </a:xfrm>
+          <a:prstGeom prst="rect">
+            <a:avLst/>
+          </a:prstGeom>
+          <a:noFill/>
+        </p:spPr>
+        <p:txBody>
+          <a:bodyPr wrap="square" anchor="t" lIns="0" rIns="0" tIns="0" bIns="0">
+            <a:noAutofit/>
+          </a:bodyPr>
+          <a:lstStyle/>
+          <a:p>
+            <a:pPr algn="l">
+              <a:lnSpc>
+                <a:spcPct val="105000"/>
               </a:lnSpc>
               <a:spcBef>
                 <a:spcPts val="0"/>
@@ -24517,7 +24459,6 @@
           <a:ln>
             <a:noFill/>
           </a:ln>
-          <a:effectLst/>
           <a:effectLst>
             <a:outerShdw blurRad="114300" dist="50800" dir="5400000" rotWithShape="0">
               <a:srgbClr val="40210A">
@@ -24743,7 +24684,6 @@
           <a:ln>
             <a:noFill/>
           </a:ln>
-          <a:effectLst/>
           <a:effectLst>
             <a:outerShdw blurRad="114300" dist="50800" dir="5400000" rotWithShape="0">
               <a:srgbClr val="40210A">
@@ -24969,7 +24909,6 @@
           <a:ln>
             <a:noFill/>
           </a:ln>
-          <a:effectLst/>
           <a:effectLst>
             <a:outerShdw blurRad="114300" dist="50800" dir="5400000" rotWithShape="0">
               <a:srgbClr val="40210A">
@@ -25195,7 +25134,6 @@
           <a:ln>
             <a:noFill/>
           </a:ln>
-          <a:effectLst/>
           <a:effectLst>
             <a:outerShdw blurRad="114300" dist="50800" dir="5400000" rotWithShape="0">
               <a:srgbClr val="40210A">
@@ -25421,7 +25359,6 @@
           <a:ln>
             <a:noFill/>
           </a:ln>
-          <a:effectLst/>
           <a:effectLst>
             <a:outerShdw blurRad="114300" dist="50800" dir="5400000" rotWithShape="0">
               <a:srgbClr val="40210A">
@@ -25663,23 +25600,23 @@
         </p:nvSpPr>
         <p:spPr>
           <a:xfrm>
-            <a:off x="777240" y="457200"/>
-            <a:ext cx="8595360" cy="457200"/>
-          </a:xfrm>
-          <a:prstGeom prst="rect">
-            <a:avLst/>
-          </a:prstGeom>
-          <a:noFill/>
-        </p:spPr>
-        <p:txBody>
-          <a:bodyPr wrap="square" anchor="t" lIns="0" rIns="0" tIns="0" bIns="0">
-            <a:noAutofit/>
-          </a:bodyPr>
-          <a:lstStyle/>
-          <a:p>
-            <a:pPr algn="l">
-              <a:lnSpc>
-                <a:spcPct val="128000"/>
+            <a:off x="777240" y="438912"/>
+            <a:ext cx="8595360" cy="603504"/>
+          </a:xfrm>
+          <a:prstGeom prst="rect">
+            <a:avLst/>
+          </a:prstGeom>
+          <a:noFill/>
+        </p:spPr>
+        <p:txBody>
+          <a:bodyPr wrap="square" anchor="t" lIns="0" rIns="0" tIns="0" bIns="0">
+            <a:noAutofit/>
+          </a:bodyPr>
+          <a:lstStyle/>
+          <a:p>
+            <a:pPr algn="l">
+              <a:lnSpc>
+                <a:spcPct val="105000"/>
               </a:lnSpc>
               <a:spcBef>
                 <a:spcPts val="0"/>
@@ -25791,7 +25728,7 @@
                 <a:ea typeface="微软雅黑"/>
                 <a:cs typeface="微软雅黑"/>
               </a:rPr>
-              <a:t>目标不是炫技，而是在「不下载任何模型」的前提下，拿到接近语义检索的召回质量。</a:t>
+              <a:t>目标不是炫技：在「不下载任何模型」的前提下拿到可用的语义召回。实测 62 道菜 → 99 个检索块 / 1024 维 / 293ms。</a:t>
             </a:r>
           </a:p>
         </p:txBody>
@@ -25958,7 +25895,6 @@
               <a:srgbClr val="EBE0D6"/>
             </a:solidFill>
           </a:ln>
-          <a:effectLst/>
           <a:effectLst>
             <a:outerShdw blurRad="114300" dist="50800" dir="5400000" rotWithShape="0">
               <a:srgbClr val="40210A">
@@ -26290,7 +26226,6 @@
               <a:srgbClr val="EBE0D6"/>
             </a:solidFill>
           </a:ln>
-          <a:effectLst/>
           <a:effectLst>
             <a:outerShdw blurRad="114300" dist="50800" dir="5400000" rotWithShape="0">
               <a:srgbClr val="40210A">
@@ -26622,7 +26557,6 @@
               <a:srgbClr val="EBE0D6"/>
             </a:solidFill>
           </a:ln>
-          <a:effectLst/>
           <a:effectLst>
             <a:outerShdw blurRad="114300" dist="50800" dir="5400000" rotWithShape="0">
               <a:srgbClr val="40210A">
@@ -26954,7 +26888,6 @@
               <a:srgbClr val="EBE0D6"/>
             </a:solidFill>
           </a:ln>
-          <a:effectLst/>
           <a:effectLst>
             <a:outerShdw blurRad="114300" dist="50800" dir="5400000" rotWithShape="0">
               <a:srgbClr val="40210A">
@@ -27883,23 +27816,23 @@
         </p:nvSpPr>
         <p:spPr>
           <a:xfrm>
-            <a:off x="777240" y="457200"/>
-            <a:ext cx="8595360" cy="457200"/>
-          </a:xfrm>
-          <a:prstGeom prst="rect">
-            <a:avLst/>
-          </a:prstGeom>
-          <a:noFill/>
-        </p:spPr>
-        <p:txBody>
-          <a:bodyPr wrap="square" anchor="t" lIns="0" rIns="0" tIns="0" bIns="0">
-            <a:noAutofit/>
-          </a:bodyPr>
-          <a:lstStyle/>
-          <a:p>
-            <a:pPr algn="l">
-              <a:lnSpc>
-                <a:spcPct val="128000"/>
+            <a:off x="777240" y="438912"/>
+            <a:ext cx="8595360" cy="603504"/>
+          </a:xfrm>
+          <a:prstGeom prst="rect">
+            <a:avLst/>
+          </a:prstGeom>
+          <a:noFill/>
+        </p:spPr>
+        <p:txBody>
+          <a:bodyPr wrap="square" anchor="t" lIns="0" rIns="0" tIns="0" bIns="0">
+            <a:noAutofit/>
+          </a:bodyPr>
+          <a:lstStyle/>
+          <a:p>
+            <a:pPr algn="l">
+              <a:lnSpc>
+                <a:spcPct val="105000"/>
               </a:lnSpc>
               <a:spcBef>
                 <a:spcPts val="0"/>
@@ -28178,7 +28111,6 @@
               <a:srgbClr val="EBE0D6"/>
             </a:solidFill>
           </a:ln>
-          <a:effectLst/>
           <a:effectLst>
             <a:outerShdw blurRad="114300" dist="50800" dir="5400000" rotWithShape="0">
               <a:srgbClr val="40210A">
